--- a/_implementation-notes/evening-series/FotH Evening Session 4 Slides DRAFT v1.pptx
+++ b/_implementation-notes/evening-series/FotH Evening Session 4 Slides DRAFT v1.pptx
@@ -10,6 +10,7 @@
   <p:sldIdLst>
     <p:sldId id="256" r:id="rId2"/>
     <p:sldId id="267" r:id="rId48"/>
+    <p:sldId id="528" r:id="rId22"/>
     <p:sldId id="268" r:id="rId49"/>
     <p:sldId id="353" r:id="rId50"/>
     <p:sldId id="354" r:id="rId51"/>
@@ -18,7 +19,8 @@
     <p:sldId id="357" r:id="rId54"/>
     <p:sldId id="358" r:id="rId55"/>
     <p:sldId id="359" r:id="rId56"/>
-    <p:sldId id="527" r:id="rId57"/>
+    <p:sldId id="529" r:id="rId23"/>
+    <p:sldId id="530" r:id="rId24"/>
     <p:sldId id="360" r:id="rId58"/>
     <p:sldId id="361" r:id="rId59"/>
   </p:sldIdLst>
@@ -750,6 +752,214 @@
 </p:notes>
 </file>
 
+<file path=ppt/notesSlides/notesSlide14.xml><?xml version="1.0" encoding="utf-8"?>
+<p:notes xmlns:a="http://schemas.openxmlformats.org/drawingml/2006/main" xmlns:p="http://schemas.openxmlformats.org/presentationml/2006/main" xmlns:r="http://schemas.openxmlformats.org/officeDocument/2006/relationships">
+  <p:cSld>
+    <p:spTree>
+      <p:nvGrpSpPr>
+        <p:cNvPr id="1" name=""/>
+        <p:cNvGrpSpPr/>
+        <p:nvPr/>
+      </p:nvGrpSpPr>
+      <p:grpSpPr>
+        <a:xfrm>
+          <a:off x="0" y="0"/>
+          <a:ext cx="0" cy="0"/>
+          <a:chOff x="0" y="0"/>
+          <a:chExt cx="0" cy="0"/>
+        </a:xfrm>
+      </p:grpSpPr>
+      <p:sp>
+        <p:nvSpPr>
+          <p:cNvPr id="2" name="Notes Placeholder 1"/>
+          <p:cNvSpPr>
+            <a:spLocks noGrp="1"/>
+          </p:cNvSpPr>
+          <p:nvPr>
+            <p:ph type="body" idx="1"/>
+          </p:nvPr>
+        </p:nvSpPr>
+        <p:spPr/>
+        <p:txBody>
+          <a:bodyPr/>
+          <a:lstStyle/>
+          <a:p>
+            <a:r>
+              <a:t>S4 · WELCOME · LEAD: CONTAINER HOLDER · GROUNDING — every session opens on this map</a:t>
+            </a:r>
+          </a:p>
+          <a:p>
+            <a:r>
+              <a:t>BEATS:</a:t>
+            </a:r>
+          </a:p>
+          <a:p>
+            <a:r>
+              <a:t>1. Locate tonight on the map, plainly: Session 4 crosses from the first box toward the second — Self opening toward Others — walked again, teen-led. Each connection makes the next one real (Matt. 22:37–40).</a:t>
+            </a:r>
+          </a:p>
+          <a:p>
+            <a:r>
+              <a:t>2. The four boxes are one journey — each connection makes the next one real — rooted in the two great commandments: love God, love neighbor (Matt 22:37–40).</a:t>
+            </a:r>
+          </a:p>
+          <a:p>
+            <a:r>
+              <a:t>3. This is also the 'where we are on the map' minute the welcome owes any newcomer.</a:t>
+            </a:r>
+          </a:p>
+          <a:p>
+            <a:r>
+              <a:t>CUES: Two minutes at most; then tonight's road.</a:t>
+            </a:r>
+          </a:p>
+        </p:txBody>
+      </p:sp>
+    </p:spTree>
+  </p:cSld>
+  <p:clrMapOvr>
+    <a:masterClrMapping/>
+  </p:clrMapOvr>
+</p:notes>
+</file>
+
+<file path=ppt/notesSlides/notesSlide15.xml><?xml version="1.0" encoding="utf-8"?>
+<p:notes xmlns:a="http://schemas.openxmlformats.org/drawingml/2006/main" xmlns:p="http://schemas.openxmlformats.org/presentationml/2006/main" xmlns:r="http://schemas.openxmlformats.org/officeDocument/2006/relationships">
+  <p:cSld>
+    <p:spTree>
+      <p:nvGrpSpPr>
+        <p:cNvPr id="1" name=""/>
+        <p:cNvGrpSpPr/>
+        <p:nvPr/>
+      </p:nvGrpSpPr>
+      <p:grpSpPr>
+        <a:xfrm>
+          <a:off x="0" y="0"/>
+          <a:ext cx="0" cy="0"/>
+          <a:chOff x="0" y="0"/>
+          <a:chExt cx="0" cy="0"/>
+        </a:xfrm>
+      </p:grpSpPr>
+      <p:sp>
+        <p:nvSpPr>
+          <p:cNvPr id="2" name="Notes Placeholder 1"/>
+          <p:cNvSpPr>
+            <a:spLocks noGrp="1"/>
+          </p:cNvSpPr>
+          <p:nvPr>
+            <p:ph type="body" idx="1"/>
+          </p:nvPr>
+        </p:nvSpPr>
+        <p:spPr/>
+        <p:txBody>
+          <a:bodyPr/>
+          <a:lstStyle/>
+          <a:p>
+            <a:r>
+              <a:t>S4 · COMMISSIONING · LEAD: CONTENT PRESENTER</a:t>
+            </a:r>
+          </a:p>
+          <a:p>
+            <a:r>
+              <a:t>BEATS:</a:t>
+            </a:r>
+          </a:p>
+          <a:p>
+            <a:r>
+              <a:t>1. The sheet on the screen is the sheet in their hands — walk it, don't read it.</a:t>
+            </a:r>
+          </a:p>
+          <a:p>
+            <a:r>
+              <a:t>2. The standing rhythm first: the morning question, the evening journal line — one box per day on the week-grids.</a:t>
+            </a:r>
+          </a:p>
+          <a:p>
+            <a:r>
+              <a:t>3. A missed box is never a failure — it is an invitation to return.</a:t>
+            </a:r>
+          </a:p>
+          <a:p>
+            <a:r>
+              <a:t>CUES: The four parts are the next slide.</a:t>
+            </a:r>
+          </a:p>
+        </p:txBody>
+      </p:sp>
+    </p:spTree>
+  </p:cSld>
+  <p:clrMapOvr>
+    <a:masterClrMapping/>
+  </p:clrMapOvr>
+</p:notes>
+</file>
+
+<file path=ppt/notesSlides/notesSlide16.xml><?xml version="1.0" encoding="utf-8"?>
+<p:notes xmlns:a="http://schemas.openxmlformats.org/drawingml/2006/main" xmlns:p="http://schemas.openxmlformats.org/presentationml/2006/main" xmlns:r="http://schemas.openxmlformats.org/officeDocument/2006/relationships">
+  <p:cSld>
+    <p:spTree>
+      <p:nvGrpSpPr>
+        <p:cNvPr id="1" name=""/>
+        <p:cNvGrpSpPr/>
+        <p:nvPr/>
+      </p:nvGrpSpPr>
+      <p:grpSpPr>
+        <a:xfrm>
+          <a:off x="0" y="0"/>
+          <a:ext cx="0" cy="0"/>
+          <a:chOff x="0" y="0"/>
+          <a:chExt cx="0" cy="0"/>
+        </a:xfrm>
+      </p:grpSpPr>
+      <p:sp>
+        <p:nvSpPr>
+          <p:cNvPr id="2" name="Notes Placeholder 1"/>
+          <p:cNvSpPr>
+            <a:spLocks noGrp="1"/>
+          </p:cNvSpPr>
+          <p:nvPr>
+            <p:ph type="body" idx="1"/>
+          </p:nvPr>
+        </p:nvSpPr>
+        <p:spPr/>
+        <p:txBody>
+          <a:bodyPr/>
+          <a:lstStyle/>
+          <a:p>
+            <a:r>
+              <a:t>S4 · COMMISSIONING · LEAD: CONTENT PRESENTER</a:t>
+            </a:r>
+          </a:p>
+          <a:p>
+            <a:r>
+              <a:t>BEATS:</a:t>
+            </a:r>
+          </a:p>
+          <a:p>
+            <a:r>
+              <a:t>1. The four parts, in order: the homework practice, week one; the end-of-week-one check-in; the homework practice, week two; one sentence of preparation.</a:t>
+            </a:r>
+          </a:p>
+          <a:p>
+            <a:r>
+              <a:t>2. Check-in partners are named aloud before leaving this slide — the sheet has the line to write the name.</a:t>
+            </a:r>
+          </a:p>
+          <a:p>
+            <a:r>
+              <a:t>GUARD: The sheet-walk, not a re-teach.</a:t>
+            </a:r>
+          </a:p>
+        </p:txBody>
+      </p:sp>
+    </p:spTree>
+  </p:cSld>
+  <p:clrMapOvr>
+    <a:masterClrMapping/>
+  </p:clrMapOvr>
+</p:notes>
+</file>
+
 <file path=ppt/notesSlides/notesSlide46.xml><?xml version="1.0" encoding="utf-8"?>
 <p:notes xmlns:a="http://schemas.openxmlformats.org/drawingml/2006/main" xmlns:r="http://schemas.openxmlformats.org/officeDocument/2006/relationships" xmlns:p="http://schemas.openxmlformats.org/presentationml/2006/main">
   <p:cSld>
@@ -919,32 +1129,32 @@
           <a:lstStyle/>
           <a:p>
             <a:r>
-              <a:rPr lang="en-US" sz="1200"/>
               <a:t>S4 · 7:00–7:08 · LEAD: CONTAINER HOLDER</a:t>
             </a:r>
           </a:p>
           <a:p>
             <a:r>
-              <a:rPr lang="en-US" sz="1200"/>
               <a:t>BEATS:</a:t>
             </a:r>
           </a:p>
           <a:p>
             <a:r>
-              <a:rPr lang="en-US" sz="1200"/>
               <a:t>1. The Companion-in-Formation opens the night: blessing, container, Week 4 frame — the pieces are required, their own words are fine (card H4.1).</a:t>
             </a:r>
           </a:p>
           <a:p>
             <a:r>
-              <a:rPr lang="en-US" sz="1200"/>
               <a:t>2. You sit in the circle as a participant and do not hover.</a:t>
             </a:r>
           </a:p>
           <a:p>
             <a:r>
-              <a:rPr lang="en-US" sz="1200"/>
               <a:t>CUES: The room registers a teen leading within ten seconds. Let it — no introduction, no explanation, no applause. Receive the opening exactly as the room received it from the Lead Companion in Weeks 1–3.</a:t>
+            </a:r>
+          </a:p>
+          <a:p>
+            <a:r>
+              <a:t>PAIR LEAD: name the leading pair in the welcome — two leaders hold tonight, and the room will see the evening handed back and forth between them; that is the design. The pair practices the session together beforehand.</a:t>
             </a:r>
           </a:p>
         </p:txBody>
@@ -1132,32 +1342,32 @@
           <a:lstStyle/>
           <a:p>
             <a:r>
-              <a:rPr lang="en-US" sz="1200"/>
               <a:t>S4 · 7:31–7:32 · LEAD: CONTENT PRESENTER · TRANSITION</a:t>
             </a:r>
           </a:p>
           <a:p>
             <a:r>
-              <a:rPr lang="en-US" sz="1200"/>
               <a:t>BEATS:</a:t>
             </a:r>
           </a:p>
           <a:p>
             <a:r>
-              <a:rPr lang="en-US" sz="1200"/>
               <a:t>1. The senior takes the bridge from the card: one question; listeners receive and bless — no fixing, no advising, no relating back; nothing leaves the pair.</a:t>
             </a:r>
           </a:p>
           <a:p>
             <a:r>
-              <a:rPr lang="en-US" sz="1200"/>
-              <a:t>2. The senior prays, then sends: same pairs, same rooms as last week, families together; back at 5:12.</a:t>
-            </a:r>
-          </a:p>
-          <a:p>
-            <a:r>
-              <a:rPr lang="en-US" sz="1200"/>
+              <a:t>2. The senior prays, then sends: same pairs, in pairs where you sit as last week, families together; back at 5:12.</a:t>
+            </a:r>
+          </a:p>
+          <a:p>
+            <a:r>
               <a:t>CUES: Ten or fewer — 'We're staying right here, one circle, same rules,' and flow straight into the telling.</a:t>
+            </a:r>
+          </a:p>
+          <a:p>
+            <a:r>
+              <a:t>SMALL ROOM: the split is only necessary if the room is large enough to need it. With six or so, stay one circle — or quick pair work in place, knee to knee. Pair work is also the standing time-recovery lever: a full split-and-merge costs about five minutes.</a:t>
             </a:r>
           </a:p>
         </p:txBody>
@@ -1383,71 +1593,6 @@
             <a:r>
               <a:rPr lang="en-US" sz="1200"/>
               <a:t>3. Everyone keeps the morning question and evening note going: 'that rhythm is quietly doing more than any single evenings.'</a:t>
-            </a:r>
-          </a:p>
-        </p:txBody>
-      </p:sp>
-    </p:spTree>
-  </p:cSld>
-  <p:clrMapOvr>
-    <a:masterClrMapping/>
-  </p:clrMapOvr>
-</p:notes>
-</file>
-
-<file path=ppt/notesSlides/notesSlide55.xml><?xml version="1.0" encoding="utf-8"?>
-<p:notes xmlns:a="http://schemas.openxmlformats.org/drawingml/2006/main" xmlns:r="http://schemas.openxmlformats.org/officeDocument/2006/relationships" xmlns:p="http://schemas.openxmlformats.org/presentationml/2006/main">
-  <p:cSld>
-    <p:spTree>
-      <p:nvGrpSpPr>
-        <p:cNvPr id="1" name=""/>
-        <p:cNvGrpSpPr/>
-        <p:nvPr/>
-      </p:nvGrpSpPr>
-      <p:grpSpPr>
-        <a:xfrm>
-          <a:off x="0" y="0"/>
-          <a:ext cx="0" cy="0"/>
-          <a:chOff x="0" y="0"/>
-          <a:chExt cx="0" cy="0"/>
-        </a:xfrm>
-      </p:grpSpPr>
-      <p:sp>
-        <p:nvSpPr>
-          <p:cNvPr id="2" name="Notes Placeholder 1"/>
-          <p:cNvSpPr>
-            <a:spLocks noGrp="1"/>
-          </p:cNvSpPr>
-          <p:nvPr>
-            <p:ph type="body" idx="1"/>
-          </p:nvPr>
-        </p:nvSpPr>
-        <p:spPr/>
-        <p:txBody>
-          <a:bodyPr/>
-          <a:lstStyle/>
-          <a:p>
-            <a:r>
-              <a:rPr lang="en-US" sz="1200"/>
-              <a:t>S4 · 8:20–8:24 · LEAD: CONTENT PRESENTER</a:t>
-            </a:r>
-          </a:p>
-          <a:p>
-            <a:r>
-              <a:rPr lang="en-US" sz="1200"/>
-              <a:t>BEATS:</a:t>
-            </a:r>
-          </a:p>
-          <a:p>
-            <a:r>
-              <a:rPr lang="en-US" sz="1200"/>
-              <a:t>1. Check-off card (H4.2): daily morning question and evening note; the Joint Footprints box is only for families not yet done.</a:t>
-            </a:r>
-          </a:p>
-          <a:p>
-            <a:r>
-              <a:rPr lang="en-US" sz="1200"/>
-              <a:t>CUES: Rides inside the practice block.</a:t>
             </a:r>
           </a:p>
         </p:txBody>
@@ -4807,7 +4952,1646 @@
 </p:sld>
 </file>
 
-<file path=ppt/slides/slide47.xml><?xml version="1.0" encoding="utf-8"?>
+<file path=ppt/slides/slide10.xml><?xml version="1.0" encoding="utf-8"?>
+<p:sld xmlns:a="http://schemas.openxmlformats.org/drawingml/2006/main" xmlns:r="http://schemas.openxmlformats.org/officeDocument/2006/relationships" xmlns:p="http://schemas.openxmlformats.org/presentationml/2006/main">
+  <p:cSld>
+    <p:spTree>
+      <p:nvGrpSpPr>
+        <p:cNvPr id="1" name=""/>
+        <p:cNvGrpSpPr/>
+        <p:nvPr/>
+      </p:nvGrpSpPr>
+      <p:grpSpPr>
+        <a:xfrm>
+          <a:off x="0" y="0"/>
+          <a:ext cx="0" cy="0"/>
+          <a:chOff x="0" y="0"/>
+          <a:chExt cx="0" cy="0"/>
+        </a:xfrm>
+      </p:grpSpPr>
+      <p:sp>
+        <p:nvSpPr>
+          <p:cNvPr id="2" name="Rectangle 1"/>
+          <p:cNvSpPr/>
+          <p:nvPr/>
+        </p:nvSpPr>
+        <p:spPr>
+          <a:xfrm>
+            <a:off x="0" y="0"/>
+            <a:ext cx="12191695" cy="6858000"/>
+          </a:xfrm>
+          <a:prstGeom prst="rect">
+            <a:avLst/>
+          </a:prstGeom>
+          <a:solidFill>
+            <a:srgbClr val="FFFFFF"/>
+          </a:solidFill>
+          <a:ln>
+            <a:noFill/>
+          </a:ln>
+        </p:spPr>
+        <p:txBody>
+          <a:bodyPr/>
+          <a:lstStyle/>
+          <a:p>
+            <a:endParaRPr/>
+          </a:p>
+        </p:txBody>
+      </p:sp>
+      <p:sp>
+        <p:nvSpPr>
+          <p:cNvPr id="3" name="TextBox 2"/>
+          <p:cNvSpPr txBox="1"/>
+          <p:nvPr/>
+        </p:nvSpPr>
+        <p:spPr>
+          <a:xfrm>
+            <a:off x="822960" y="502920"/>
+            <a:ext cx="10515600" cy="822960"/>
+          </a:xfrm>
+          <a:prstGeom prst="rect">
+            <a:avLst/>
+          </a:prstGeom>
+          <a:noFill/>
+        </p:spPr>
+        <p:txBody>
+          <a:bodyPr wrap="square">
+            <a:spAutoFit/>
+          </a:bodyPr>
+          <a:lstStyle/>
+          <a:p>
+            <a:pPr algn="l">
+              <a:spcAft>
+                <a:spcPts val="600"/>
+              </a:spcAft>
+            </a:pPr>
+            <a:r>
+              <a:rPr sz="2800" b="1" i="0">
+                <a:solidFill>
+                  <a:srgbClr val="2C5F2D"/>
+                </a:solidFill>
+                <a:latin typeface="Cambria"/>
+              </a:rPr>
+              <a:t>Homework — Two Weeks, Four Parts</a:t>
+            </a:r>
+          </a:p>
+        </p:txBody>
+      </p:sp>
+      <p:sp>
+        <p:nvSpPr>
+          <p:cNvPr id="4" name="TextBox 4"/>
+          <p:cNvSpPr txBox="1"/>
+          <p:nvPr/>
+        </p:nvSpPr>
+        <p:spPr>
+          <a:xfrm>
+            <a:off x="822960" y="1554480"/>
+            <a:ext cx="6675120" cy="4892040"/>
+          </a:xfrm>
+          <a:prstGeom prst="rect">
+            <a:avLst/>
+          </a:prstGeom>
+          <a:noFill/>
+        </p:spPr>
+        <p:txBody>
+          <a:bodyPr wrap="square" lIns="91440" tIns="91440" rIns="91440" bIns="91440"/>
+          <a:lstStyle/>
+          <a:p>
+            <a:pPr marL="274320" indent="-274320">
+              <a:spcAft>
+                <a:spcPts val="900"/>
+              </a:spcAft>
+            </a:pPr>
+            <a:r>
+              <a:rPr sz="2200" b="1" i="0">
+                <a:solidFill>
+                  <a:srgbClr val="97BC62"/>
+                </a:solidFill>
+                <a:latin typeface="Calibri"/>
+              </a:rPr>
+              <a:t>•  </a:t>
+            </a:r>
+            <a:r>
+              <a:rPr sz="2200" b="0" i="0">
+                <a:solidFill>
+                  <a:srgbClr val="222B22"/>
+                </a:solidFill>
+                <a:latin typeface="Calibri"/>
+              </a:rPr>
+              <a:t>Joint Footprints — for every family that hasn’t done it yet. Parent and teen, twenty minutes, sometime this week</a:t>
+            </a:r>
+          </a:p>
+          <a:p>
+            <a:pPr marL="274320" indent="-274320">
+              <a:spcAft>
+                <a:spcPts val="900"/>
+              </a:spcAft>
+            </a:pPr>
+            <a:r>
+              <a:rPr sz="2200" b="1" i="0">
+                <a:solidFill>
+                  <a:srgbClr val="97BC62"/>
+                </a:solidFill>
+                <a:latin typeface="Calibri"/>
+              </a:rPr>
+              <a:t>•  </a:t>
+            </a:r>
+            <a:r>
+              <a:rPr sz="2200" b="0" i="0">
+                <a:solidFill>
+                  <a:srgbClr val="222B22"/>
+                </a:solidFill>
+                <a:latin typeface="Calibri"/>
+              </a:rPr>
+              <a:t>Not in the car, not in front of a screen. Phones away</a:t>
+            </a:r>
+          </a:p>
+          <a:p>
+            <a:pPr marL="274320" indent="-274320">
+              <a:spcAft>
+                <a:spcPts val="900"/>
+              </a:spcAft>
+            </a:pPr>
+            <a:r>
+              <a:rPr sz="2200" b="1" i="0">
+                <a:solidFill>
+                  <a:srgbClr val="97BC62"/>
+                </a:solidFill>
+                <a:latin typeface="Calibri"/>
+              </a:rPr>
+              <a:t>•  </a:t>
+            </a:r>
+            <a:r>
+              <a:rPr sz="2200" b="0" i="0">
+                <a:solidFill>
+                  <a:srgbClr val="222B22"/>
+                </a:solidFill>
+                <a:latin typeface="Calibri"/>
+              </a:rPr>
+              <a:t>Five minutes telling, a follow-up question or two, and one sentence: “What I love about your footprints is...” Then swap</a:t>
+            </a:r>
+          </a:p>
+          <a:p>
+            <a:pPr marL="274320" indent="-274320">
+              <a:spcAft>
+                <a:spcPts val="900"/>
+              </a:spcAft>
+            </a:pPr>
+            <a:r>
+              <a:rPr sz="2200" b="1" i="0">
+                <a:solidFill>
+                  <a:srgbClr val="97BC62"/>
+                </a:solidFill>
+                <a:latin typeface="Calibri"/>
+              </a:rPr>
+              <a:t>•  </a:t>
+            </a:r>
+            <a:r>
+              <a:rPr sz="2200" b="0" i="0">
+                <a:solidFill>
+                  <a:srgbClr val="222B22"/>
+                </a:solidFill>
+                <a:latin typeface="Calibri"/>
+              </a:rPr>
+              <a:t>“Families who already did it — you’re done; don’t force a repeat.”</a:t>
+            </a:r>
+          </a:p>
+          <a:p>
+            <a:pPr marL="274320" indent="-274320">
+              <a:spcAft>
+                <a:spcPts val="900"/>
+              </a:spcAft>
+            </a:pPr>
+            <a:r>
+              <a:rPr sz="2200" b="1" i="0">
+                <a:solidFill>
+                  <a:srgbClr val="97BC62"/>
+                </a:solidFill>
+                <a:latin typeface="Calibri"/>
+              </a:rPr>
+              <a:t>•  </a:t>
+            </a:r>
+            <a:r>
+              <a:rPr sz="2200" b="0" i="0">
+                <a:solidFill>
+                  <a:srgbClr val="222B22"/>
+                </a:solidFill>
+                <a:latin typeface="Calibri"/>
+              </a:rPr>
+              <a:t>Everyone keeps the morning question and the evening journal note going — five minutes in the morning, two at night</a:t>
+            </a:r>
+          </a:p>
+        </p:txBody>
+      </p:sp>
+      <p:sp>
+        <p:nvSpPr>
+          <p:cNvPr id="90" name="SlideNum"/>
+          <p:cNvSpPr txBox="1"/>
+          <p:nvPr/>
+        </p:nvSpPr>
+        <p:spPr>
+          <a:xfrm>
+            <a:off x="11384280" y="6446520"/>
+            <a:ext cx="640080" cy="292608"/>
+          </a:xfrm>
+          <a:prstGeom prst="rect">
+            <a:avLst/>
+          </a:prstGeom>
+          <a:noFill/>
+        </p:spPr>
+        <p:txBody>
+          <a:bodyPr wrap="none" lIns="0" tIns="0" rIns="45720" bIns="0" anchor="ctr"/>
+          <a:lstStyle/>
+          <a:p>
+            <a:pPr algn="r"/>
+            <a:r>
+              <a:t>55</a:t>
+            </a:r>
+            <a:endParaRPr sz="1000" b="1">
+              <a:solidFill>
+                <a:srgbClr val="7A8A6E"/>
+              </a:solidFill>
+              <a:latin typeface="Calibri"/>
+            </a:endParaRPr>
+          </a:p>
+        </p:txBody>
+      </p:sp>
+      <p:pic>
+        <p:nvPicPr>
+          <p:cNvPr id="33" name="Picture 33" descr="seedling - what grows between Wednesdays"/>
+          <p:cNvPicPr>
+            <a:picLocks noChangeAspect="1"/>
+          </p:cNvPicPr>
+          <p:nvPr/>
+        </p:nvPicPr>
+        <p:blipFill>
+          <a:blip r:embed="rId3"/>
+          <a:stretch>
+            <a:fillRect/>
+          </a:stretch>
+        </p:blipFill>
+        <p:spPr>
+          <a:xfrm>
+            <a:off x="8103612" y="1463040"/>
+            <a:ext cx="3262379" cy="4892040"/>
+          </a:xfrm>
+          <a:prstGeom prst="rect">
+            <a:avLst/>
+          </a:prstGeom>
+          <a:ln w="76200">
+            <a:solidFill>
+              <a:srgbClr val="FFFFFF"/>
+            </a:solidFill>
+          </a:ln>
+          <a:effectLst>
+            <a:outerShdw blurRad="63500" dist="25400" dir="5400000" rotWithShape="0">
+              <a:srgbClr val="000000">
+                <a:alpha val="35000"/>
+              </a:srgbClr>
+            </a:outerShdw>
+          </a:effectLst>
+        </p:spPr>
+      </p:pic>
+    </p:spTree>
+  </p:cSld>
+  <p:clrMapOvr>
+    <a:masterClrMapping/>
+  </p:clrMapOvr>
+</p:sld>
+</file>
+
+<file path=ppt/slides/slide12.xml><?xml version="1.0" encoding="utf-8"?>
+<p:sld xmlns:a="http://schemas.openxmlformats.org/drawingml/2006/main" xmlns:r="http://schemas.openxmlformats.org/officeDocument/2006/relationships" xmlns:p="http://schemas.openxmlformats.org/presentationml/2006/main">
+  <p:cSld>
+    <p:spTree>
+      <p:nvGrpSpPr>
+        <p:cNvPr id="1" name=""/>
+        <p:cNvGrpSpPr/>
+        <p:nvPr/>
+      </p:nvGrpSpPr>
+      <p:grpSpPr>
+        <a:xfrm>
+          <a:off x="0" y="0"/>
+          <a:ext cx="0" cy="0"/>
+          <a:chOff x="0" y="0"/>
+          <a:chExt cx="0" cy="0"/>
+        </a:xfrm>
+      </p:grpSpPr>
+      <p:sp>
+        <p:nvSpPr>
+          <p:cNvPr id="2" name="Rectangle 1"/>
+          <p:cNvSpPr/>
+          <p:nvPr/>
+        </p:nvSpPr>
+        <p:spPr>
+          <a:xfrm>
+            <a:off x="0" y="0"/>
+            <a:ext cx="12191695" cy="6858000"/>
+          </a:xfrm>
+          <a:prstGeom prst="rect">
+            <a:avLst/>
+          </a:prstGeom>
+          <a:solidFill>
+            <a:srgbClr val="FFFFFF"/>
+          </a:solidFill>
+          <a:ln>
+            <a:noFill/>
+          </a:ln>
+        </p:spPr>
+        <p:txBody>
+          <a:bodyPr/>
+          <a:lstStyle/>
+          <a:p>
+            <a:endParaRPr/>
+          </a:p>
+        </p:txBody>
+      </p:sp>
+      <p:sp>
+        <p:nvSpPr>
+          <p:cNvPr id="3" name="TextBox 2"/>
+          <p:cNvSpPr txBox="1"/>
+          <p:nvPr/>
+        </p:nvSpPr>
+        <p:spPr>
+          <a:xfrm>
+            <a:off x="822960" y="502920"/>
+            <a:ext cx="10515600" cy="822960"/>
+          </a:xfrm>
+          <a:prstGeom prst="rect">
+            <a:avLst/>
+          </a:prstGeom>
+          <a:noFill/>
+        </p:spPr>
+        <p:txBody>
+          <a:bodyPr wrap="square">
+            <a:spAutoFit/>
+          </a:bodyPr>
+          <a:lstStyle/>
+          <a:p>
+            <a:pPr algn="l">
+              <a:spcAft>
+                <a:spcPts val="600"/>
+              </a:spcAft>
+            </a:pPr>
+            <a:r>
+              <a:rPr sz="2800" b="1" i="0">
+                <a:solidFill>
+                  <a:srgbClr val="2C5F2D"/>
+                </a:solidFill>
+                <a:latin typeface="Cambria"/>
+              </a:rPr>
+              <a:t>The Leader Feedback Round</a:t>
+            </a:r>
+          </a:p>
+        </p:txBody>
+      </p:sp>
+      <p:sp>
+        <p:nvSpPr>
+          <p:cNvPr id="4" name="TextBox 4"/>
+          <p:cNvSpPr txBox="1"/>
+          <p:nvPr/>
+        </p:nvSpPr>
+        <p:spPr>
+          <a:xfrm>
+            <a:off x="822960" y="1554480"/>
+            <a:ext cx="6675120" cy="4892040"/>
+          </a:xfrm>
+          <a:prstGeom prst="rect">
+            <a:avLst/>
+          </a:prstGeom>
+          <a:noFill/>
+        </p:spPr>
+        <p:txBody>
+          <a:bodyPr wrap="square" lIns="91440" tIns="91440" rIns="91440" bIns="91440"/>
+          <a:lstStyle/>
+          <a:p>
+            <a:pPr marL="274320" indent="-274320">
+              <a:spcAft>
+                <a:spcPts val="900"/>
+              </a:spcAft>
+            </a:pPr>
+            <a:r>
+              <a:rPr sz="2800" b="1" i="0">
+                <a:solidFill>
+                  <a:srgbClr val="97BC62"/>
+                </a:solidFill>
+                <a:latin typeface="Calibri"/>
+              </a:rPr>
+              <a:t>•  </a:t>
+            </a:r>
+            <a:r>
+              <a:rPr sz="2800" b="0" i="0">
+                <a:solidFill>
+                  <a:srgbClr val="222B22"/>
+                </a:solidFill>
+                <a:latin typeface="Calibri"/>
+              </a:rPr>
+              <a:t>Two rounds, same as every session — the container holder first, then the content presenter: three things each</a:t>
+            </a:r>
+          </a:p>
+          <a:p>
+            <a:pPr marL="685800" indent="-274320">
+              <a:spcAft>
+                <a:spcPts val="700"/>
+              </a:spcAft>
+            </a:pPr>
+            <a:r>
+              <a:rPr sz="2000" b="1" i="0">
+                <a:solidFill>
+                  <a:srgbClr val="97BC62"/>
+                </a:solidFill>
+                <a:latin typeface="Calibri"/>
+              </a:rPr>
+              <a:t>–  </a:t>
+            </a:r>
+            <a:r>
+              <a:rPr sz="2000" b="0" i="1">
+                <a:solidFill>
+                  <a:srgbClr val="222B22"/>
+                </a:solidFill>
+                <a:latin typeface="Calibri"/>
+              </a:rPr>
+              <a:t>“What I think went well tonight: ______”</a:t>
+            </a:r>
+          </a:p>
+          <a:p>
+            <a:pPr marL="685800" indent="-274320">
+              <a:spcAft>
+                <a:spcPts val="700"/>
+              </a:spcAft>
+            </a:pPr>
+            <a:r>
+              <a:rPr sz="2000" b="1" i="0">
+                <a:solidFill>
+                  <a:srgbClr val="97BC62"/>
+                </a:solidFill>
+                <a:latin typeface="Calibri"/>
+              </a:rPr>
+              <a:t>–  </a:t>
+            </a:r>
+            <a:r>
+              <a:rPr sz="2000" b="0" i="1">
+                <a:solidFill>
+                  <a:srgbClr val="222B22"/>
+                </a:solidFill>
+                <a:latin typeface="Calibri"/>
+              </a:rPr>
+              <a:t>“What I’d do differently next time: ______”</a:t>
+            </a:r>
+          </a:p>
+          <a:p>
+            <a:pPr marL="685800" indent="-274320">
+              <a:spcAft>
+                <a:spcPts val="700"/>
+              </a:spcAft>
+            </a:pPr>
+            <a:r>
+              <a:rPr sz="2000" b="1" i="0">
+                <a:solidFill>
+                  <a:srgbClr val="97BC62"/>
+                </a:solidFill>
+                <a:latin typeface="Calibri"/>
+              </a:rPr>
+              <a:t>–  </a:t>
+            </a:r>
+            <a:r>
+              <a:rPr sz="2000" b="0" i="1">
+                <a:solidFill>
+                  <a:srgbClr val="222B22"/>
+                </a:solidFill>
+                <a:latin typeface="Calibri"/>
+              </a:rPr>
+              <a:t>“If I were to teach tonight’s process to someone, I would tell them: ______”</a:t>
+            </a:r>
+          </a:p>
+          <a:p>
+            <a:pPr marL="274320" indent="-274320">
+              <a:spcAft>
+                <a:spcPts val="900"/>
+              </a:spcAft>
+            </a:pPr>
+            <a:r>
+              <a:rPr sz="2800" b="1" i="0">
+                <a:solidFill>
+                  <a:srgbClr val="97BC62"/>
+                </a:solidFill>
+                <a:latin typeface="Calibri"/>
+              </a:rPr>
+              <a:t>•  </a:t>
+            </a:r>
+            <a:r>
+              <a:rPr sz="2800" b="0" i="0">
+                <a:solidFill>
+                  <a:srgbClr val="222B22"/>
+                </a:solidFill>
+                <a:latin typeface="Calibri"/>
+              </a:rPr>
+              <a:t>Then the room — the same two questions about tonight</a:t>
+            </a:r>
+          </a:p>
+          <a:p>
+            <a:pPr marL="274320" indent="-274320">
+              <a:spcAft>
+                <a:spcPts val="900"/>
+              </a:spcAft>
+            </a:pPr>
+            <a:r>
+              <a:rPr sz="2800" b="1" i="0">
+                <a:solidFill>
+                  <a:srgbClr val="97BC62"/>
+                </a:solidFill>
+                <a:latin typeface="Calibri"/>
+              </a:rPr>
+              <a:t>•  </a:t>
+            </a:r>
+            <a:r>
+              <a:rPr sz="2800" b="0" i="0">
+                <a:solidFill>
+                  <a:srgbClr val="222B22"/>
+                </a:solidFill>
+                <a:latin typeface="Calibri"/>
+              </a:rPr>
+              <a:t>The leaders receive without defending — “thank you” is the whole response</a:t>
+            </a:r>
+          </a:p>
+        </p:txBody>
+      </p:sp>
+      <p:sp>
+        <p:nvSpPr>
+          <p:cNvPr id="90" name="SlideNum"/>
+          <p:cNvSpPr txBox="1"/>
+          <p:nvPr/>
+        </p:nvSpPr>
+        <p:spPr>
+          <a:xfrm>
+            <a:off x="11384280" y="6446520"/>
+            <a:ext cx="640080" cy="292608"/>
+          </a:xfrm>
+          <a:prstGeom prst="rect">
+            <a:avLst/>
+          </a:prstGeom>
+          <a:noFill/>
+        </p:spPr>
+        <p:txBody>
+          <a:bodyPr wrap="none" lIns="0" tIns="0" rIns="45720" bIns="0" anchor="ctr"/>
+          <a:lstStyle/>
+          <a:p>
+            <a:pPr algn="r"/>
+            <a:r>
+              <a:t>57</a:t>
+            </a:r>
+            <a:endParaRPr sz="1000" b="1">
+              <a:solidFill>
+                <a:srgbClr val="7A8A6E"/>
+              </a:solidFill>
+              <a:latin typeface="Calibri"/>
+            </a:endParaRPr>
+          </a:p>
+        </p:txBody>
+      </p:sp>
+      <p:pic>
+        <p:nvPicPr>
+          <p:cNvPr id="33" name="Picture 33" descr="compass on the trail - the weekly bearing check"/>
+          <p:cNvPicPr>
+            <a:picLocks noChangeAspect="1"/>
+          </p:cNvPicPr>
+          <p:nvPr/>
+        </p:nvPicPr>
+        <p:blipFill>
+          <a:blip r:embed="rId3"/>
+          <a:stretch>
+            <a:fillRect/>
+          </a:stretch>
+        </p:blipFill>
+        <p:spPr>
+          <a:xfrm>
+            <a:off x="8106160" y="1463040"/>
+            <a:ext cx="3259831" cy="4892040"/>
+          </a:xfrm>
+          <a:prstGeom prst="rect">
+            <a:avLst/>
+          </a:prstGeom>
+          <a:ln w="76200">
+            <a:solidFill>
+              <a:srgbClr val="FFFFFF"/>
+            </a:solidFill>
+          </a:ln>
+          <a:effectLst>
+            <a:outerShdw blurRad="63500" dist="25400" dir="5400000" rotWithShape="0">
+              <a:srgbClr val="000000">
+                <a:alpha val="35000"/>
+              </a:srgbClr>
+            </a:outerShdw>
+          </a:effectLst>
+        </p:spPr>
+      </p:pic>
+    </p:spTree>
+  </p:cSld>
+  <p:clrMapOvr>
+    <a:masterClrMapping/>
+  </p:clrMapOvr>
+</p:sld>
+</file>
+
+<file path=ppt/slides/slide13.xml><?xml version="1.0" encoding="utf-8"?>
+<p:sld xmlns:a="http://schemas.openxmlformats.org/drawingml/2006/main" xmlns:r="http://schemas.openxmlformats.org/officeDocument/2006/relationships" xmlns:p="http://schemas.openxmlformats.org/presentationml/2006/main">
+  <p:cSld>
+    <p:spTree>
+      <p:nvGrpSpPr>
+        <p:cNvPr id="1" name=""/>
+        <p:cNvGrpSpPr/>
+        <p:nvPr/>
+      </p:nvGrpSpPr>
+      <p:grpSpPr>
+        <a:xfrm>
+          <a:off x="0" y="0"/>
+          <a:ext cx="0" cy="0"/>
+          <a:chOff x="0" y="0"/>
+          <a:chExt cx="0" cy="0"/>
+        </a:xfrm>
+      </p:grpSpPr>
+      <p:sp>
+        <p:nvSpPr>
+          <p:cNvPr id="2" name="Rectangle 1"/>
+          <p:cNvSpPr/>
+          <p:nvPr/>
+        </p:nvSpPr>
+        <p:spPr>
+          <a:xfrm>
+            <a:off x="0" y="0"/>
+            <a:ext cx="12191695" cy="6858000"/>
+          </a:xfrm>
+          <a:prstGeom prst="rect">
+            <a:avLst/>
+          </a:prstGeom>
+          <a:solidFill>
+            <a:srgbClr val="FFFFFF"/>
+          </a:solidFill>
+          <a:ln>
+            <a:noFill/>
+          </a:ln>
+        </p:spPr>
+        <p:txBody>
+          <a:bodyPr/>
+          <a:lstStyle/>
+          <a:p>
+            <a:endParaRPr/>
+          </a:p>
+        </p:txBody>
+      </p:sp>
+      <p:sp>
+        <p:nvSpPr>
+          <p:cNvPr id="3" name="TextBox 2"/>
+          <p:cNvSpPr txBox="1"/>
+          <p:nvPr/>
+        </p:nvSpPr>
+        <p:spPr>
+          <a:xfrm>
+            <a:off x="822960" y="502920"/>
+            <a:ext cx="10515600" cy="822960"/>
+          </a:xfrm>
+          <a:prstGeom prst="rect">
+            <a:avLst/>
+          </a:prstGeom>
+          <a:noFill/>
+        </p:spPr>
+        <p:txBody>
+          <a:bodyPr wrap="square">
+            <a:spAutoFit/>
+          </a:bodyPr>
+          <a:lstStyle/>
+          <a:p>
+            <a:pPr algn="l">
+              <a:spcAft>
+                <a:spcPts val="600"/>
+              </a:spcAft>
+            </a:pPr>
+            <a:r>
+              <a:rPr sz="2800" b="1" i="0">
+                <a:solidFill>
+                  <a:srgbClr val="2C5F2D"/>
+                </a:solidFill>
+                <a:latin typeface="Cambria"/>
+              </a:rPr>
+              <a:t>Closing the Container + Aaronic Blessing</a:t>
+            </a:r>
+          </a:p>
+        </p:txBody>
+      </p:sp>
+      <p:sp>
+        <p:nvSpPr>
+          <p:cNvPr id="4" name="TextBox 4"/>
+          <p:cNvSpPr txBox="1"/>
+          <p:nvPr/>
+        </p:nvSpPr>
+        <p:spPr>
+          <a:xfrm>
+            <a:off x="822960" y="1600200"/>
+            <a:ext cx="5669280" cy="4572000"/>
+          </a:xfrm>
+          <a:prstGeom prst="rect">
+            <a:avLst/>
+          </a:prstGeom>
+          <a:noFill/>
+        </p:spPr>
+        <p:txBody>
+          <a:bodyPr wrap="square" lIns="91440" tIns="91440" rIns="91440" bIns="91440"/>
+          <a:lstStyle/>
+          <a:p>
+            <a:pPr marL="274320" indent="-274320">
+              <a:spcAft>
+                <a:spcPts val="900"/>
+              </a:spcAft>
+            </a:pPr>
+            <a:r>
+              <a:rPr sz="2200" b="1" i="0">
+                <a:solidFill>
+                  <a:srgbClr val="97BC62"/>
+                </a:solidFill>
+                <a:latin typeface="Calibri"/>
+              </a:rPr>
+              <a:t>•  </a:t>
+            </a:r>
+            <a:r>
+              <a:rPr sz="2200" b="0" i="0">
+                <a:solidFill>
+                  <a:srgbClr val="222B22"/>
+                </a:solidFill>
+                <a:latin typeface="Calibri"/>
+              </a:rPr>
+              <a:t>We close the way we opened — the container, six steps:</a:t>
+            </a:r>
+          </a:p>
+          <a:p>
+            <a:pPr marL="685800" indent="-274320">
+              <a:spcAft>
+                <a:spcPts val="700"/>
+              </a:spcAft>
+            </a:pPr>
+            <a:r>
+              <a:rPr sz="2000" b="1" i="0">
+                <a:solidFill>
+                  <a:srgbClr val="97BC62"/>
+                </a:solidFill>
+                <a:latin typeface="Calibri"/>
+              </a:rPr>
+              <a:t>1   </a:t>
+            </a:r>
+            <a:r>
+              <a:rPr sz="2000" b="0" i="0">
+                <a:solidFill>
+                  <a:srgbClr val="222B22"/>
+                </a:solidFill>
+                <a:latin typeface="Calibri"/>
+              </a:rPr>
+              <a:t>Stand again — same circle, same posture as the open</a:t>
+            </a:r>
+          </a:p>
+          <a:p>
+            <a:pPr marL="685800" indent="-274320">
+              <a:spcAft>
+                <a:spcPts val="700"/>
+              </a:spcAft>
+            </a:pPr>
+            <a:r>
+              <a:rPr sz="2000" b="1" i="0">
+                <a:solidFill>
+                  <a:srgbClr val="97BC62"/>
+                </a:solidFill>
+                <a:latin typeface="Calibri"/>
+              </a:rPr>
+              <a:t>2   </a:t>
+            </a:r>
+            <a:r>
+              <a:rPr sz="2000" b="0" i="0">
+                <a:solidFill>
+                  <a:srgbClr val="222B22"/>
+                </a:solidFill>
+                <a:latin typeface="Calibri"/>
+              </a:rPr>
+              <a:t>One-word landing — compare it to your opening word</a:t>
+            </a:r>
+          </a:p>
+          <a:p>
+            <a:pPr marL="685800" indent="-274320">
+              <a:spcAft>
+                <a:spcPts val="700"/>
+              </a:spcAft>
+            </a:pPr>
+            <a:r>
+              <a:rPr sz="2000" b="1" i="0">
+                <a:solidFill>
+                  <a:srgbClr val="97BC62"/>
+                </a:solidFill>
+                <a:latin typeface="Calibri"/>
+              </a:rPr>
+              <a:t>3   </a:t>
+            </a:r>
+            <a:r>
+              <a:rPr sz="2000" b="0" i="0">
+                <a:solidFill>
+                  <a:srgbClr val="222B22"/>
+                </a:solidFill>
+                <a:latin typeface="Calibri"/>
+              </a:rPr>
+              <a:t>The one thing you are taking from tonight</a:t>
+            </a:r>
+          </a:p>
+          <a:p>
+            <a:pPr marL="685800" indent="-274320">
+              <a:spcAft>
+                <a:spcPts val="700"/>
+              </a:spcAft>
+            </a:pPr>
+            <a:r>
+              <a:rPr sz="2000" b="1" i="0">
+                <a:solidFill>
+                  <a:srgbClr val="97BC62"/>
+                </a:solidFill>
+                <a:latin typeface="Calibri"/>
+              </a:rPr>
+              <a:t>4   </a:t>
+            </a:r>
+            <a:r>
+              <a:rPr sz="2000" b="0" i="0">
+                <a:solidFill>
+                  <a:srgbClr val="222B22"/>
+                </a:solidFill>
+                <a:latin typeface="Calibri"/>
+              </a:rPr>
+              <a:t>The one practice — committed aloud, or modified to one you will actually keep</a:t>
+            </a:r>
+          </a:p>
+          <a:p>
+            <a:pPr marL="685800" indent="-274320">
+              <a:spcAft>
+                <a:spcPts val="700"/>
+              </a:spcAft>
+            </a:pPr>
+            <a:r>
+              <a:rPr sz="2000" b="1" i="0">
+                <a:solidFill>
+                  <a:srgbClr val="97BC62"/>
+                </a:solidFill>
+                <a:latin typeface="Calibri"/>
+              </a:rPr>
+              <a:t>5   </a:t>
+            </a:r>
+            <a:r>
+              <a:rPr sz="2000" b="0" i="0">
+                <a:solidFill>
+                  <a:srgbClr val="222B22"/>
+                </a:solidFill>
+                <a:latin typeface="Calibri"/>
+              </a:rPr>
+              <a:t>Blessings — specific, witnessed, short</a:t>
+            </a:r>
+          </a:p>
+          <a:p>
+            <a:pPr marL="685800" indent="-274320">
+              <a:spcAft>
+                <a:spcPts val="700"/>
+              </a:spcAft>
+            </a:pPr>
+            <a:r>
+              <a:rPr sz="2000" b="1" i="0">
+                <a:solidFill>
+                  <a:srgbClr val="97BC62"/>
+                </a:solidFill>
+                <a:latin typeface="Calibri"/>
+              </a:rPr>
+              <a:t>6   </a:t>
+            </a:r>
+            <a:r>
+              <a:rPr sz="2000" b="0" i="0">
+                <a:solidFill>
+                  <a:srgbClr val="222B22"/>
+                </a:solidFill>
+                <a:latin typeface="Calibri"/>
+              </a:rPr>
+              <a:t>Closing prayer — and the Aaronic blessing, spoken over each other, face to face</a:t>
+            </a:r>
+          </a:p>
+        </p:txBody>
+      </p:sp>
+      <p:sp>
+        <p:nvSpPr>
+          <p:cNvPr id="6" name="TextBox 6"/>
+          <p:cNvSpPr txBox="1"/>
+          <p:nvPr/>
+        </p:nvSpPr>
+        <p:spPr>
+          <a:xfrm>
+            <a:off x="6766560" y="1737360"/>
+            <a:ext cx="4663440" cy="2926080"/>
+          </a:xfrm>
+          <a:prstGeom prst="rect">
+            <a:avLst/>
+          </a:prstGeom>
+          <a:solidFill>
+            <a:srgbClr val="F1F6EC"/>
+          </a:solidFill>
+        </p:spPr>
+        <p:txBody>
+          <a:bodyPr wrap="square" lIns="91440" tIns="91440" rIns="91440" bIns="91440" anchor="ctr"/>
+          <a:lstStyle/>
+          <a:p>
+            <a:pPr>
+              <a:spcAft>
+                <a:spcPts val="900"/>
+              </a:spcAft>
+            </a:pPr>
+            <a:r>
+              <a:rPr sz="1200" b="1" i="0">
+                <a:solidFill>
+                  <a:srgbClr val="97BC62"/>
+                </a:solidFill>
+                <a:latin typeface="Calibri"/>
+              </a:rPr>
+              <a:t>THE AARONIC BLESSING — NUMBERS 6:24–26</a:t>
+            </a:r>
+          </a:p>
+          <a:p>
+            <a:pPr>
+              <a:spcAft>
+                <a:spcPts val="600"/>
+              </a:spcAft>
+            </a:pPr>
+            <a:r>
+              <a:rPr sz="2400" b="0" i="1">
+                <a:solidFill>
+                  <a:srgbClr val="222B22"/>
+                </a:solidFill>
+                <a:latin typeface="Cambria"/>
+              </a:rPr>
+              <a:t>“The Lord bless you and keep you;</a:t>
+            </a:r>
+          </a:p>
+          <a:p>
+            <a:pPr>
+              <a:spcAft>
+                <a:spcPts val="600"/>
+              </a:spcAft>
+            </a:pPr>
+            <a:r>
+              <a:rPr sz="2400" b="0" i="1">
+                <a:solidFill>
+                  <a:srgbClr val="222B22"/>
+                </a:solidFill>
+                <a:latin typeface="Cambria"/>
+              </a:rPr>
+              <a:t>the Lord make his face to shine upon you, and be gracious to you;</a:t>
+            </a:r>
+          </a:p>
+          <a:p>
+            <a:pPr>
+              <a:spcAft>
+                <a:spcPts val="600"/>
+              </a:spcAft>
+            </a:pPr>
+            <a:r>
+              <a:rPr sz="2400" b="0" i="1">
+                <a:solidFill>
+                  <a:srgbClr val="222B22"/>
+                </a:solidFill>
+                <a:latin typeface="Cambria"/>
+              </a:rPr>
+              <a:t>the Lord lift up his countenance upon you, and give you peace.”</a:t>
+            </a:r>
+          </a:p>
+        </p:txBody>
+      </p:sp>
+      <p:sp>
+        <p:nvSpPr>
+          <p:cNvPr id="90" name="SlideNum"/>
+          <p:cNvSpPr txBox="1"/>
+          <p:nvPr/>
+        </p:nvSpPr>
+        <p:spPr>
+          <a:xfrm>
+            <a:off x="11384280" y="6446520"/>
+            <a:ext cx="640080" cy="292608"/>
+          </a:xfrm>
+          <a:prstGeom prst="rect">
+            <a:avLst/>
+          </a:prstGeom>
+          <a:noFill/>
+        </p:spPr>
+        <p:txBody>
+          <a:bodyPr wrap="none" lIns="0" tIns="0" rIns="45720" bIns="0" anchor="ctr"/>
+          <a:lstStyle/>
+          <a:p>
+            <a:pPr algn="r"/>
+            <a:r>
+              <a:t>58</a:t>
+            </a:r>
+            <a:endParaRPr sz="1000" b="1">
+              <a:solidFill>
+                <a:srgbClr val="7A8A6E"/>
+              </a:solidFill>
+              <a:latin typeface="Calibri"/>
+            </a:endParaRPr>
+          </a:p>
+        </p:txBody>
+      </p:sp>
+    </p:spTree>
+  </p:cSld>
+  <p:clrMapOvr>
+    <a:masterClrMapping/>
+  </p:clrMapOvr>
+</p:sld>
+</file>
+
+<file path=ppt/slides/slide14.xml><?xml version="1.0" encoding="utf-8"?>
+<p:sld xmlns:a="http://schemas.openxmlformats.org/drawingml/2006/main" xmlns:p="http://schemas.openxmlformats.org/presentationml/2006/main" xmlns:r="http://schemas.openxmlformats.org/officeDocument/2006/relationships">
+  <p:cSld>
+    <p:spTree>
+      <p:nvGrpSpPr>
+        <p:cNvPr id="1" name=""/>
+        <p:cNvGrpSpPr/>
+        <p:nvPr/>
+      </p:nvGrpSpPr>
+      <p:grpSpPr/>
+      <p:sp>
+        <p:nvSpPr>
+          <p:cNvPr id="2" name="Rectangle 1"/>
+          <p:cNvSpPr/>
+          <p:nvPr/>
+        </p:nvSpPr>
+        <p:spPr>
+          <a:xfrm>
+            <a:off x="0" y="0"/>
+            <a:ext cx="12192000" cy="6858000"/>
+          </a:xfrm>
+          <a:prstGeom prst="rect">
+            <a:avLst/>
+          </a:prstGeom>
+          <a:solidFill>
+            <a:srgbClr val="FFFFFF"/>
+          </a:solidFill>
+          <a:ln>
+            <a:noFill/>
+          </a:ln>
+          <a:effectLst/>
+        </p:spPr>
+        <p:style>
+          <a:lnRef idx="1">
+            <a:schemeClr val="accent1"/>
+          </a:lnRef>
+          <a:fillRef idx="3">
+            <a:schemeClr val="accent1"/>
+          </a:fillRef>
+          <a:effectRef idx="2">
+            <a:schemeClr val="accent1"/>
+          </a:effectRef>
+          <a:fontRef idx="minor">
+            <a:schemeClr val="lt1"/>
+          </a:fontRef>
+        </p:style>
+        <p:txBody>
+          <a:bodyPr rtlCol="0" anchor="ctr"/>
+          <a:lstStyle/>
+          <a:p>
+            <a:pPr algn="ctr"/>
+          </a:p>
+        </p:txBody>
+      </p:sp>
+      <p:sp>
+        <p:nvSpPr>
+          <p:cNvPr id="3" name="TextBox 2"/>
+          <p:cNvSpPr txBox="1"/>
+          <p:nvPr/>
+        </p:nvSpPr>
+        <p:spPr>
+          <a:xfrm>
+            <a:off x="822960" y="502920"/>
+            <a:ext cx="10515600" cy="822960"/>
+          </a:xfrm>
+          <a:prstGeom prst="rect">
+            <a:avLst/>
+          </a:prstGeom>
+          <a:noFill/>
+        </p:spPr>
+        <p:txBody>
+          <a:bodyPr wrap="square">
+            <a:spAutoFit/>
+          </a:bodyPr>
+          <a:lstStyle/>
+          <a:p>
+            <a:r>
+              <a:rPr sz="2800" b="1">
+                <a:solidFill>
+                  <a:srgbClr val="2C5F2D"/>
+                </a:solidFill>
+                <a:latin typeface="Cambria"/>
+              </a:rPr>
+              <a:t>Where We Are — the Four Connects</a:t>
+            </a:r>
+          </a:p>
+        </p:txBody>
+      </p:sp>
+      <p:pic>
+        <p:nvPicPr>
+          <p:cNvPr id="4" name="Picture 3" descr="four-connects.png"/>
+          <p:cNvPicPr>
+            <a:picLocks noChangeAspect="1"/>
+          </p:cNvPicPr>
+          <p:nvPr/>
+        </p:nvPicPr>
+        <p:blipFill>
+          <a:blip r:embed="rId2"/>
+          <a:stretch>
+            <a:fillRect/>
+          </a:stretch>
+        </p:blipFill>
+        <p:spPr>
+          <a:xfrm>
+            <a:off x="932688" y="1645920"/>
+            <a:ext cx="10332720" cy="3708663"/>
+          </a:xfrm>
+          <a:prstGeom prst="rect">
+            <a:avLst/>
+          </a:prstGeom>
+        </p:spPr>
+      </p:pic>
+      <p:sp>
+        <p:nvSpPr>
+          <p:cNvPr id="5" name="TextBox 4"/>
+          <p:cNvSpPr txBox="1"/>
+          <p:nvPr/>
+        </p:nvSpPr>
+        <p:spPr>
+          <a:xfrm>
+            <a:off x="822960" y="5623560"/>
+            <a:ext cx="10515600" cy="914400"/>
+          </a:xfrm>
+          <a:prstGeom prst="rect">
+            <a:avLst/>
+          </a:prstGeom>
+          <a:noFill/>
+        </p:spPr>
+        <p:txBody>
+          <a:bodyPr wrap="square">
+            <a:spAutoFit/>
+          </a:bodyPr>
+          <a:lstStyle/>
+          <a:p>
+            <a:r>
+              <a:rPr sz="1800" b="0">
+                <a:solidFill>
+                  <a:srgbClr val="222B22"/>
+                </a:solidFill>
+                <a:latin typeface="Calibri"/>
+              </a:rPr>
+              <a:t>Session 4 crosses from the first box toward the second — </a:t>
+            </a:r>
+            <a:r>
+              <a:rPr sz="1800" b="1">
+                <a:solidFill>
+                  <a:srgbClr val="2C5F2D"/>
+                </a:solidFill>
+                <a:latin typeface="Calibri"/>
+              </a:rPr>
+              <a:t>Self opening toward Others</a:t>
+            </a:r>
+            <a:r>
+              <a:rPr sz="1800" b="0">
+                <a:solidFill>
+                  <a:srgbClr val="222B22"/>
+                </a:solidFill>
+                <a:latin typeface="Calibri"/>
+              </a:rPr>
+              <a:t> — walked again, teen-led. Each connection makes the next one real (Matt. 22:37–40).</a:t>
+            </a:r>
+          </a:p>
+        </p:txBody>
+      </p:sp>
+      <p:sp>
+        <p:nvSpPr>
+          <p:cNvPr id="90" name="SlideNum"/>
+          <p:cNvSpPr txBox="1"/>
+          <p:nvPr/>
+        </p:nvSpPr>
+        <p:spPr>
+          <a:xfrm>
+            <a:off x="11384280" y="6446520"/>
+            <a:ext cx="640080" cy="292608"/>
+          </a:xfrm>
+          <a:prstGeom prst="rect">
+            <a:avLst/>
+          </a:prstGeom>
+          <a:noFill/>
+        </p:spPr>
+        <p:txBody>
+          <a:bodyPr wrap="none" lIns="0" tIns="0" rIns="45720" bIns="0" anchor="ctr"/>
+          <a:lstStyle/>
+          <a:p>
+            <a:pPr algn="r"/>
+            <a:r>
+              <a:t>47a</a:t>
+            </a:r>
+            <a:endParaRPr sz="1000" b="1">
+              <a:solidFill>
+                <a:srgbClr val="7A8A6E"/>
+              </a:solidFill>
+              <a:latin typeface="Calibri"/>
+            </a:endParaRPr>
+          </a:p>
+        </p:txBody>
+      </p:sp>
+    </p:spTree>
+  </p:cSld>
+  <p:clrMapOvr>
+    <a:masterClrMapping/>
+  </p:clrMapOvr>
+</p:sld>
+</file>
+
+<file path=ppt/slides/slide15.xml><?xml version="1.0" encoding="utf-8"?>
+<p:sld xmlns:a="http://schemas.openxmlformats.org/drawingml/2006/main" xmlns:p="http://schemas.openxmlformats.org/presentationml/2006/main" xmlns:r="http://schemas.openxmlformats.org/officeDocument/2006/relationships">
+  <p:cSld>
+    <p:spTree>
+      <p:nvGrpSpPr>
+        <p:cNvPr id="1" name=""/>
+        <p:cNvGrpSpPr/>
+        <p:nvPr/>
+      </p:nvGrpSpPr>
+      <p:grpSpPr/>
+      <p:sp>
+        <p:nvSpPr>
+          <p:cNvPr id="2" name="Rectangle 1"/>
+          <p:cNvSpPr/>
+          <p:nvPr/>
+        </p:nvSpPr>
+        <p:spPr>
+          <a:xfrm>
+            <a:off x="0" y="0"/>
+            <a:ext cx="12192000" cy="6858000"/>
+          </a:xfrm>
+          <a:prstGeom prst="rect">
+            <a:avLst/>
+          </a:prstGeom>
+          <a:solidFill>
+            <a:srgbClr val="FFFFFF"/>
+          </a:solidFill>
+          <a:ln>
+            <a:noFill/>
+          </a:ln>
+          <a:effectLst/>
+        </p:spPr>
+        <p:style>
+          <a:lnRef idx="1">
+            <a:schemeClr val="accent1"/>
+          </a:lnRef>
+          <a:fillRef idx="3">
+            <a:schemeClr val="accent1"/>
+          </a:fillRef>
+          <a:effectRef idx="2">
+            <a:schemeClr val="accent1"/>
+          </a:effectRef>
+          <a:fontRef idx="minor">
+            <a:schemeClr val="lt1"/>
+          </a:fontRef>
+        </p:style>
+        <p:txBody>
+          <a:bodyPr rtlCol="0" anchor="ctr"/>
+          <a:lstStyle/>
+          <a:p>
+            <a:pPr algn="ctr"/>
+          </a:p>
+        </p:txBody>
+      </p:sp>
+      <p:sp>
+        <p:nvSpPr>
+          <p:cNvPr id="3" name="TextBox 2"/>
+          <p:cNvSpPr txBox="1"/>
+          <p:nvPr/>
+        </p:nvSpPr>
+        <p:spPr>
+          <a:xfrm>
+            <a:off x="822960" y="502920"/>
+            <a:ext cx="10515600" cy="822960"/>
+          </a:xfrm>
+          <a:prstGeom prst="rect">
+            <a:avLst/>
+          </a:prstGeom>
+          <a:noFill/>
+        </p:spPr>
+        <p:txBody>
+          <a:bodyPr wrap="square">
+            <a:spAutoFit/>
+          </a:bodyPr>
+          <a:lstStyle/>
+          <a:p>
+            <a:r>
+              <a:rPr sz="2800" b="1">
+                <a:solidFill>
+                  <a:srgbClr val="2C5F2D"/>
+                </a:solidFill>
+                <a:latin typeface="Cambria"/>
+              </a:rPr>
+              <a:t>The Take-Home Sheet — the Daily Rhythm</a:t>
+            </a:r>
+          </a:p>
+        </p:txBody>
+      </p:sp>
+      <p:pic>
+        <p:nvPicPr>
+          <p:cNvPr id="4" name="Picture 3" descr="s4_part1.png"/>
+          <p:cNvPicPr>
+            <a:picLocks noChangeAspect="1"/>
+          </p:cNvPicPr>
+          <p:nvPr/>
+        </p:nvPicPr>
+        <p:blipFill>
+          <a:blip r:embed="rId2"/>
+          <a:stretch>
+            <a:fillRect/>
+          </a:stretch>
+        </p:blipFill>
+        <p:spPr>
+          <a:xfrm>
+            <a:off x="1798167" y="1463040"/>
+            <a:ext cx="8595360" cy="4039819"/>
+          </a:xfrm>
+          <a:prstGeom prst="rect">
+            <a:avLst/>
+          </a:prstGeom>
+          <a:ln w="12700">
+            <a:solidFill>
+              <a:srgbClr val="C8C8C8"/>
+            </a:solidFill>
+          </a:ln>
+        </p:spPr>
+      </p:pic>
+      <p:sp>
+        <p:nvSpPr>
+          <p:cNvPr id="5" name="TextBox 4"/>
+          <p:cNvSpPr txBox="1"/>
+          <p:nvPr/>
+        </p:nvSpPr>
+        <p:spPr>
+          <a:xfrm>
+            <a:off x="822960" y="6355080"/>
+            <a:ext cx="10515600" cy="411480"/>
+          </a:xfrm>
+          <a:prstGeom prst="rect">
+            <a:avLst/>
+          </a:prstGeom>
+          <a:noFill/>
+        </p:spPr>
+        <p:txBody>
+          <a:bodyPr wrap="square">
+            <a:spAutoFit/>
+          </a:bodyPr>
+          <a:lstStyle/>
+          <a:p>
+            <a:r>
+              <a:rPr sz="1400" i="1">
+                <a:solidFill>
+                  <a:srgbClr val="595959"/>
+                </a:solidFill>
+                <a:latin typeface="Calibri"/>
+              </a:rPr>
+              <a:t>Handed out now — this is the sheet in your hands.</a:t>
+            </a:r>
+          </a:p>
+        </p:txBody>
+      </p:sp>
+      <p:sp>
+        <p:nvSpPr>
+          <p:cNvPr id="90" name="SlideNum"/>
+          <p:cNvSpPr txBox="1"/>
+          <p:nvPr/>
+        </p:nvSpPr>
+        <p:spPr>
+          <a:xfrm>
+            <a:off x="11384280" y="6446520"/>
+            <a:ext cx="640080" cy="292608"/>
+          </a:xfrm>
+          <a:prstGeom prst="rect">
+            <a:avLst/>
+          </a:prstGeom>
+          <a:noFill/>
+        </p:spPr>
+        <p:txBody>
+          <a:bodyPr wrap="none" lIns="0" tIns="0" rIns="45720" bIns="0" anchor="ctr"/>
+          <a:lstStyle/>
+          <a:p>
+            <a:pPr algn="r"/>
+            <a:r>
+              <a:t>56</a:t>
+            </a:r>
+            <a:endParaRPr sz="1000" b="1">
+              <a:solidFill>
+                <a:srgbClr val="7A8A6E"/>
+              </a:solidFill>
+              <a:latin typeface="Calibri"/>
+            </a:endParaRPr>
+          </a:p>
+        </p:txBody>
+      </p:sp>
+    </p:spTree>
+  </p:cSld>
+  <p:clrMapOvr>
+    <a:masterClrMapping/>
+  </p:clrMapOvr>
+</p:sld>
+</file>
+
+<file path=ppt/slides/slide16.xml><?xml version="1.0" encoding="utf-8"?>
+<p:sld xmlns:a="http://schemas.openxmlformats.org/drawingml/2006/main" xmlns:p="http://schemas.openxmlformats.org/presentationml/2006/main" xmlns:r="http://schemas.openxmlformats.org/officeDocument/2006/relationships">
+  <p:cSld>
+    <p:spTree>
+      <p:nvGrpSpPr>
+        <p:cNvPr id="1" name=""/>
+        <p:cNvGrpSpPr/>
+        <p:nvPr/>
+      </p:nvGrpSpPr>
+      <p:grpSpPr/>
+      <p:sp>
+        <p:nvSpPr>
+          <p:cNvPr id="2" name="Rectangle 1"/>
+          <p:cNvSpPr/>
+          <p:nvPr/>
+        </p:nvSpPr>
+        <p:spPr>
+          <a:xfrm>
+            <a:off x="0" y="0"/>
+            <a:ext cx="12192000" cy="6858000"/>
+          </a:xfrm>
+          <a:prstGeom prst="rect">
+            <a:avLst/>
+          </a:prstGeom>
+          <a:solidFill>
+            <a:srgbClr val="FFFFFF"/>
+          </a:solidFill>
+          <a:ln>
+            <a:noFill/>
+          </a:ln>
+          <a:effectLst/>
+        </p:spPr>
+        <p:style>
+          <a:lnRef idx="1">
+            <a:schemeClr val="accent1"/>
+          </a:lnRef>
+          <a:fillRef idx="3">
+            <a:schemeClr val="accent1"/>
+          </a:fillRef>
+          <a:effectRef idx="2">
+            <a:schemeClr val="accent1"/>
+          </a:effectRef>
+          <a:fontRef idx="minor">
+            <a:schemeClr val="lt1"/>
+          </a:fontRef>
+        </p:style>
+        <p:txBody>
+          <a:bodyPr rtlCol="0" anchor="ctr"/>
+          <a:lstStyle/>
+          <a:p>
+            <a:pPr algn="ctr"/>
+          </a:p>
+        </p:txBody>
+      </p:sp>
+      <p:sp>
+        <p:nvSpPr>
+          <p:cNvPr id="3" name="TextBox 2"/>
+          <p:cNvSpPr txBox="1"/>
+          <p:nvPr/>
+        </p:nvSpPr>
+        <p:spPr>
+          <a:xfrm>
+            <a:off x="822960" y="502920"/>
+            <a:ext cx="10515600" cy="822960"/>
+          </a:xfrm>
+          <a:prstGeom prst="rect">
+            <a:avLst/>
+          </a:prstGeom>
+          <a:noFill/>
+        </p:spPr>
+        <p:txBody>
+          <a:bodyPr wrap="square">
+            <a:spAutoFit/>
+          </a:bodyPr>
+          <a:lstStyle/>
+          <a:p>
+            <a:r>
+              <a:rPr sz="2800" b="1">
+                <a:solidFill>
+                  <a:srgbClr val="2C5F2D"/>
+                </a:solidFill>
+                <a:latin typeface="Cambria"/>
+              </a:rPr>
+              <a:t>The Take-Home Sheet — the Four Parts</a:t>
+            </a:r>
+          </a:p>
+        </p:txBody>
+      </p:sp>
+      <p:pic>
+        <p:nvPicPr>
+          <p:cNvPr id="4" name="Picture 3" descr="s4_part2.png"/>
+          <p:cNvPicPr>
+            <a:picLocks noChangeAspect="1"/>
+          </p:cNvPicPr>
+          <p:nvPr/>
+        </p:nvPicPr>
+        <p:blipFill>
+          <a:blip r:embed="rId2"/>
+          <a:stretch>
+            <a:fillRect/>
+          </a:stretch>
+        </p:blipFill>
+        <p:spPr>
+          <a:xfrm>
+            <a:off x="2066004" y="1463040"/>
+            <a:ext cx="8059687" cy="4709160"/>
+          </a:xfrm>
+          <a:prstGeom prst="rect">
+            <a:avLst/>
+          </a:prstGeom>
+          <a:ln w="12700">
+            <a:solidFill>
+              <a:srgbClr val="C8C8C8"/>
+            </a:solidFill>
+          </a:ln>
+        </p:spPr>
+      </p:pic>
+      <p:sp>
+        <p:nvSpPr>
+          <p:cNvPr id="5" name="TextBox 4"/>
+          <p:cNvSpPr txBox="1"/>
+          <p:nvPr/>
+        </p:nvSpPr>
+        <p:spPr>
+          <a:xfrm>
+            <a:off x="822960" y="6355080"/>
+            <a:ext cx="10515600" cy="411480"/>
+          </a:xfrm>
+          <a:prstGeom prst="rect">
+            <a:avLst/>
+          </a:prstGeom>
+          <a:noFill/>
+        </p:spPr>
+        <p:txBody>
+          <a:bodyPr wrap="square">
+            <a:spAutoFit/>
+          </a:bodyPr>
+          <a:lstStyle/>
+          <a:p>
+            <a:r>
+              <a:rPr sz="1400" i="1">
+                <a:solidFill>
+                  <a:srgbClr val="595959"/>
+                </a:solidFill>
+                <a:latin typeface="Calibri"/>
+              </a:rPr>
+              <a:t>One practice at a time — and a partner expecting you at the end of week one.</a:t>
+            </a:r>
+          </a:p>
+        </p:txBody>
+      </p:sp>
+      <p:sp>
+        <p:nvSpPr>
+          <p:cNvPr id="90" name="SlideNum"/>
+          <p:cNvSpPr txBox="1"/>
+          <p:nvPr/>
+        </p:nvSpPr>
+        <p:spPr>
+          <a:xfrm>
+            <a:off x="11384280" y="6446520"/>
+            <a:ext cx="640080" cy="292608"/>
+          </a:xfrm>
+          <a:prstGeom prst="rect">
+            <a:avLst/>
+          </a:prstGeom>
+          <a:noFill/>
+        </p:spPr>
+        <p:txBody>
+          <a:bodyPr wrap="none" lIns="0" tIns="0" rIns="45720" bIns="0" anchor="ctr"/>
+          <a:lstStyle/>
+          <a:p>
+            <a:pPr algn="r"/>
+            <a:r>
+              <a:t>56a</a:t>
+            </a:r>
+            <a:endParaRPr sz="1000" b="1">
+              <a:solidFill>
+                <a:srgbClr val="7A8A6E"/>
+              </a:solidFill>
+              <a:latin typeface="Calibri"/>
+            </a:endParaRPr>
+          </a:p>
+        </p:txBody>
+      </p:sp>
+    </p:spTree>
+  </p:cSld>
+  <p:clrMapOvr>
+    <a:masterClrMapping/>
+  </p:clrMapOvr>
+</p:sld>
+</file>
+
+<file path=ppt/slides/slide2.xml><?xml version="1.0" encoding="utf-8"?>
 <p:sld xmlns:a="http://schemas.openxmlformats.org/drawingml/2006/main" xmlns:r="http://schemas.openxmlformats.org/officeDocument/2006/relationships" xmlns:p="http://schemas.openxmlformats.org/presentationml/2006/main">
   <p:cSld>
     <p:spTree>
@@ -5056,7 +6840,7 @@
 </p:sld>
 </file>
 
-<file path=ppt/slides/slide48.xml><?xml version="1.0" encoding="utf-8"?>
+<file path=ppt/slides/slide3.xml><?xml version="1.0" encoding="utf-8"?>
 <p:sld xmlns:a="http://schemas.openxmlformats.org/drawingml/2006/main" xmlns:r="http://schemas.openxmlformats.org/officeDocument/2006/relationships" xmlns:p="http://schemas.openxmlformats.org/presentationml/2006/main">
   <p:cSld>
     <p:spTree>
@@ -5482,7 +7266,7 @@
 </p:sld>
 </file>
 
-<file path=ppt/slides/slide49.xml><?xml version="1.0" encoding="utf-8"?>
+<file path=ppt/slides/slide4.xml><?xml version="1.0" encoding="utf-8"?>
 <p:sld xmlns:a="http://schemas.openxmlformats.org/drawingml/2006/main" xmlns:r="http://schemas.openxmlformats.org/officeDocument/2006/relationships" xmlns:p="http://schemas.openxmlformats.org/presentationml/2006/main">
   <p:cSld>
     <p:spTree>
@@ -5829,7 +7613,7 @@
 </p:sld>
 </file>
 
-<file path=ppt/slides/slide50.xml><?xml version="1.0" encoding="utf-8"?>
+<file path=ppt/slides/slide5.xml><?xml version="1.0" encoding="utf-8"?>
 <p:sld xmlns:a="http://schemas.openxmlformats.org/drawingml/2006/main" xmlns:r="http://schemas.openxmlformats.org/officeDocument/2006/relationships" xmlns:p="http://schemas.openxmlformats.org/presentationml/2006/main">
   <p:cSld>
     <p:spTree>
@@ -6112,7 +7896,7 @@
 </p:sld>
 </file>
 
-<file path=ppt/slides/slide51.xml><?xml version="1.0" encoding="utf-8"?>
+<file path=ppt/slides/slide6.xml><?xml version="1.0" encoding="utf-8"?>
 <p:sld xmlns:a="http://schemas.openxmlformats.org/drawingml/2006/main" xmlns:r="http://schemas.openxmlformats.org/officeDocument/2006/relationships" xmlns:p="http://schemas.openxmlformats.org/presentationml/2006/main">
   <p:cSld>
     <p:spTree>
@@ -6414,7 +8198,7 @@
 </p:sld>
 </file>
 
-<file path=ppt/slides/slide52.xml><?xml version="1.0" encoding="utf-8"?>
+<file path=ppt/slides/slide7.xml><?xml version="1.0" encoding="utf-8"?>
 <p:sld xmlns:a="http://schemas.openxmlformats.org/drawingml/2006/main" xmlns:r="http://schemas.openxmlformats.org/officeDocument/2006/relationships" xmlns:p="http://schemas.openxmlformats.org/presentationml/2006/main">
   <p:cSld>
     <p:spTree>
@@ -6615,7 +8399,7 @@
                 </a:solidFill>
                 <a:latin typeface="Calibri"/>
               </a:rPr>
-              <a:t>Same pairs and same rooms as last week — your family stays with you</a:t>
+              <a:t>Same pairs and in pairs where you sit as last week — your family stays with you</a:t>
             </a:r>
           </a:p>
         </p:txBody>
@@ -6661,7 +8445,7 @@
 </p:sld>
 </file>
 
-<file path=ppt/slides/slide53.xml><?xml version="1.0" encoding="utf-8"?>
+<file path=ppt/slides/slide8.xml><?xml version="1.0" encoding="utf-8"?>
 <p:sld xmlns:a="http://schemas.openxmlformats.org/drawingml/2006/main" xmlns:r="http://schemas.openxmlformats.org/officeDocument/2006/relationships" xmlns:p="http://schemas.openxmlformats.org/presentationml/2006/main">
   <p:cSld>
     <p:spTree>
@@ -6958,7 +8742,7 @@
 </p:sld>
 </file>
 
-<file path=ppt/slides/slide54.xml><?xml version="1.0" encoding="utf-8"?>
+<file path=ppt/slides/slide9.xml><?xml version="1.0" encoding="utf-8"?>
 <p:sld xmlns:a="http://schemas.openxmlformats.org/drawingml/2006/main" xmlns:r="http://schemas.openxmlformats.org/officeDocument/2006/relationships" xmlns:p="http://schemas.openxmlformats.org/presentationml/2006/main">
   <p:cSld>
     <p:spTree>
@@ -7187,1251 +8971,6 @@
             <a:pPr algn="r"/>
             <a:r>
               <a:t>54</a:t>
-            </a:r>
-            <a:endParaRPr sz="1000" b="1">
-              <a:solidFill>
-                <a:srgbClr val="7A8A6E"/>
-              </a:solidFill>
-              <a:latin typeface="Calibri"/>
-            </a:endParaRPr>
-          </a:p>
-        </p:txBody>
-      </p:sp>
-    </p:spTree>
-  </p:cSld>
-  <p:clrMapOvr>
-    <a:masterClrMapping/>
-  </p:clrMapOvr>
-</p:sld>
-</file>
-
-<file path=ppt/slides/slide55.xml><?xml version="1.0" encoding="utf-8"?>
-<p:sld xmlns:a="http://schemas.openxmlformats.org/drawingml/2006/main" xmlns:r="http://schemas.openxmlformats.org/officeDocument/2006/relationships" xmlns:p="http://schemas.openxmlformats.org/presentationml/2006/main">
-  <p:cSld>
-    <p:spTree>
-      <p:nvGrpSpPr>
-        <p:cNvPr id="1" name=""/>
-        <p:cNvGrpSpPr/>
-        <p:nvPr/>
-      </p:nvGrpSpPr>
-      <p:grpSpPr>
-        <a:xfrm>
-          <a:off x="0" y="0"/>
-          <a:ext cx="0" cy="0"/>
-          <a:chOff x="0" y="0"/>
-          <a:chExt cx="0" cy="0"/>
-        </a:xfrm>
-      </p:grpSpPr>
-      <p:sp>
-        <p:nvSpPr>
-          <p:cNvPr id="2" name="Rectangle 1"/>
-          <p:cNvSpPr/>
-          <p:nvPr/>
-        </p:nvSpPr>
-        <p:spPr>
-          <a:xfrm>
-            <a:off x="0" y="0"/>
-            <a:ext cx="12191695" cy="6858000"/>
-          </a:xfrm>
-          <a:prstGeom prst="rect">
-            <a:avLst/>
-          </a:prstGeom>
-          <a:solidFill>
-            <a:srgbClr val="FFFFFF"/>
-          </a:solidFill>
-          <a:ln>
-            <a:noFill/>
-          </a:ln>
-        </p:spPr>
-        <p:txBody>
-          <a:bodyPr/>
-          <a:lstStyle/>
-          <a:p>
-            <a:endParaRPr/>
-          </a:p>
-        </p:txBody>
-      </p:sp>
-      <p:sp>
-        <p:nvSpPr>
-          <p:cNvPr id="3" name="TextBox 2"/>
-          <p:cNvSpPr txBox="1"/>
-          <p:nvPr/>
-        </p:nvSpPr>
-        <p:spPr>
-          <a:xfrm>
-            <a:off x="822960" y="502920"/>
-            <a:ext cx="10515600" cy="822960"/>
-          </a:xfrm>
-          <a:prstGeom prst="rect">
-            <a:avLst/>
-          </a:prstGeom>
-          <a:noFill/>
-        </p:spPr>
-        <p:txBody>
-          <a:bodyPr wrap="square">
-            <a:spAutoFit/>
-          </a:bodyPr>
-          <a:lstStyle/>
-          <a:p>
-            <a:pPr algn="l">
-              <a:spcAft>
-                <a:spcPts val="600"/>
-              </a:spcAft>
-            </a:pPr>
-            <a:r>
-              <a:rPr sz="2800" b="1" i="0">
-                <a:solidFill>
-                  <a:srgbClr val="2C5F2D"/>
-                </a:solidFill>
-                <a:latin typeface="Cambria"/>
-              </a:rPr>
-              <a:t>Homework — Two Weeks, Four Parts</a:t>
-            </a:r>
-          </a:p>
-        </p:txBody>
-      </p:sp>
-      <p:sp>
-        <p:nvSpPr>
-          <p:cNvPr id="4" name="TextBox 4"/>
-          <p:cNvSpPr txBox="1"/>
-          <p:nvPr/>
-        </p:nvSpPr>
-        <p:spPr>
-          <a:xfrm>
-            <a:off x="822960" y="1554480"/>
-            <a:ext cx="6675120" cy="4892040"/>
-          </a:xfrm>
-          <a:prstGeom prst="rect">
-            <a:avLst/>
-          </a:prstGeom>
-          <a:noFill/>
-        </p:spPr>
-        <p:txBody>
-          <a:bodyPr wrap="square" lIns="91440" tIns="91440" rIns="91440" bIns="91440"/>
-          <a:lstStyle/>
-          <a:p>
-            <a:pPr marL="274320" indent="-274320">
-              <a:spcAft>
-                <a:spcPts val="900"/>
-              </a:spcAft>
-            </a:pPr>
-            <a:r>
-              <a:rPr sz="2200" b="1" i="0">
-                <a:solidFill>
-                  <a:srgbClr val="97BC62"/>
-                </a:solidFill>
-                <a:latin typeface="Calibri"/>
-              </a:rPr>
-              <a:t>•  </a:t>
-            </a:r>
-            <a:r>
-              <a:rPr sz="2200" b="0" i="0">
-                <a:solidFill>
-                  <a:srgbClr val="222B22"/>
-                </a:solidFill>
-                <a:latin typeface="Calibri"/>
-              </a:rPr>
-              <a:t>Joint Footprints — for every family that hasn’t done it yet. Parent and teen, twenty minutes, sometime this week</a:t>
-            </a:r>
-          </a:p>
-          <a:p>
-            <a:pPr marL="274320" indent="-274320">
-              <a:spcAft>
-                <a:spcPts val="900"/>
-              </a:spcAft>
-            </a:pPr>
-            <a:r>
-              <a:rPr sz="2200" b="1" i="0">
-                <a:solidFill>
-                  <a:srgbClr val="97BC62"/>
-                </a:solidFill>
-                <a:latin typeface="Calibri"/>
-              </a:rPr>
-              <a:t>•  </a:t>
-            </a:r>
-            <a:r>
-              <a:rPr sz="2200" b="0" i="0">
-                <a:solidFill>
-                  <a:srgbClr val="222B22"/>
-                </a:solidFill>
-                <a:latin typeface="Calibri"/>
-              </a:rPr>
-              <a:t>Not in the car, not in front of a screen. Phones away</a:t>
-            </a:r>
-          </a:p>
-          <a:p>
-            <a:pPr marL="274320" indent="-274320">
-              <a:spcAft>
-                <a:spcPts val="900"/>
-              </a:spcAft>
-            </a:pPr>
-            <a:r>
-              <a:rPr sz="2200" b="1" i="0">
-                <a:solidFill>
-                  <a:srgbClr val="97BC62"/>
-                </a:solidFill>
-                <a:latin typeface="Calibri"/>
-              </a:rPr>
-              <a:t>•  </a:t>
-            </a:r>
-            <a:r>
-              <a:rPr sz="2200" b="0" i="0">
-                <a:solidFill>
-                  <a:srgbClr val="222B22"/>
-                </a:solidFill>
-                <a:latin typeface="Calibri"/>
-              </a:rPr>
-              <a:t>Five minutes telling, a follow-up question or two, and one sentence: “What I love about your footprints is...” Then swap</a:t>
-            </a:r>
-          </a:p>
-          <a:p>
-            <a:pPr marL="274320" indent="-274320">
-              <a:spcAft>
-                <a:spcPts val="900"/>
-              </a:spcAft>
-            </a:pPr>
-            <a:r>
-              <a:rPr sz="2200" b="1" i="0">
-                <a:solidFill>
-                  <a:srgbClr val="97BC62"/>
-                </a:solidFill>
-                <a:latin typeface="Calibri"/>
-              </a:rPr>
-              <a:t>•  </a:t>
-            </a:r>
-            <a:r>
-              <a:rPr sz="2200" b="0" i="0">
-                <a:solidFill>
-                  <a:srgbClr val="222B22"/>
-                </a:solidFill>
-                <a:latin typeface="Calibri"/>
-              </a:rPr>
-              <a:t>“Families who already did it — you’re done; don’t force a repeat.”</a:t>
-            </a:r>
-          </a:p>
-          <a:p>
-            <a:pPr marL="274320" indent="-274320">
-              <a:spcAft>
-                <a:spcPts val="900"/>
-              </a:spcAft>
-            </a:pPr>
-            <a:r>
-              <a:rPr sz="2200" b="1" i="0">
-                <a:solidFill>
-                  <a:srgbClr val="97BC62"/>
-                </a:solidFill>
-                <a:latin typeface="Calibri"/>
-              </a:rPr>
-              <a:t>•  </a:t>
-            </a:r>
-            <a:r>
-              <a:rPr sz="2200" b="0" i="0">
-                <a:solidFill>
-                  <a:srgbClr val="222B22"/>
-                </a:solidFill>
-                <a:latin typeface="Calibri"/>
-              </a:rPr>
-              <a:t>Everyone keeps the morning question and the evening journal note going — five minutes in the morning, two at night</a:t>
-            </a:r>
-          </a:p>
-        </p:txBody>
-      </p:sp>
-      <p:sp>
-        <p:nvSpPr>
-          <p:cNvPr id="90" name="SlideNum"/>
-          <p:cNvSpPr txBox="1"/>
-          <p:nvPr/>
-        </p:nvSpPr>
-        <p:spPr>
-          <a:xfrm>
-            <a:off x="11384280" y="6446520"/>
-            <a:ext cx="640080" cy="292608"/>
-          </a:xfrm>
-          <a:prstGeom prst="rect">
-            <a:avLst/>
-          </a:prstGeom>
-          <a:noFill/>
-        </p:spPr>
-        <p:txBody>
-          <a:bodyPr wrap="none" lIns="0" tIns="0" rIns="45720" bIns="0" anchor="ctr"/>
-          <a:lstStyle/>
-          <a:p>
-            <a:pPr algn="r"/>
-            <a:r>
-              <a:t>55</a:t>
-            </a:r>
-            <a:endParaRPr sz="1000" b="1">
-              <a:solidFill>
-                <a:srgbClr val="7A8A6E"/>
-              </a:solidFill>
-              <a:latin typeface="Calibri"/>
-            </a:endParaRPr>
-          </a:p>
-        </p:txBody>
-      </p:sp>
-      <p:pic>
-        <p:nvPicPr>
-          <p:cNvPr id="33" name="Picture 33" descr="seedling - what grows between Wednesdays"/>
-          <p:cNvPicPr>
-            <a:picLocks noChangeAspect="1"/>
-          </p:cNvPicPr>
-          <p:nvPr/>
-        </p:nvPicPr>
-        <p:blipFill>
-          <a:blip r:embed="rId3"/>
-          <a:stretch>
-            <a:fillRect/>
-          </a:stretch>
-        </p:blipFill>
-        <p:spPr>
-          <a:xfrm>
-            <a:off x="8103612" y="1463040"/>
-            <a:ext cx="3262379" cy="4892040"/>
-          </a:xfrm>
-          <a:prstGeom prst="rect">
-            <a:avLst/>
-          </a:prstGeom>
-          <a:ln w="76200">
-            <a:solidFill>
-              <a:srgbClr val="FFFFFF"/>
-            </a:solidFill>
-          </a:ln>
-          <a:effectLst>
-            <a:outerShdw blurRad="63500" dist="25400" dir="5400000" rotWithShape="0">
-              <a:srgbClr val="000000">
-                <a:alpha val="35000"/>
-              </a:srgbClr>
-            </a:outerShdw>
-          </a:effectLst>
-        </p:spPr>
-      </p:pic>
-    </p:spTree>
-  </p:cSld>
-  <p:clrMapOvr>
-    <a:masterClrMapping/>
-  </p:clrMapOvr>
-</p:sld>
-</file>
-
-<file path=ppt/slides/slide56.xml><?xml version="1.0" encoding="utf-8"?>
-<p:sld xmlns:a="http://schemas.openxmlformats.org/drawingml/2006/main" xmlns:r="http://schemas.openxmlformats.org/officeDocument/2006/relationships" xmlns:p="http://schemas.openxmlformats.org/presentationml/2006/main">
-  <p:cSld>
-    <p:spTree>
-      <p:nvGrpSpPr>
-        <p:cNvPr id="1" name=""/>
-        <p:cNvGrpSpPr/>
-        <p:nvPr/>
-      </p:nvGrpSpPr>
-      <p:grpSpPr>
-        <a:xfrm>
-          <a:off x="0" y="0"/>
-          <a:ext cx="0" cy="0"/>
-          <a:chOff x="0" y="0"/>
-          <a:chExt cx="0" cy="0"/>
-        </a:xfrm>
-      </p:grpSpPr>
-      <p:sp>
-        <p:nvSpPr>
-          <p:cNvPr id="2" name="Rectangle 1"/>
-          <p:cNvSpPr/>
-          <p:nvPr/>
-        </p:nvSpPr>
-        <p:spPr>
-          <a:xfrm>
-            <a:off x="0" y="0"/>
-            <a:ext cx="12191695" cy="6858000"/>
-          </a:xfrm>
-          <a:prstGeom prst="rect">
-            <a:avLst/>
-          </a:prstGeom>
-          <a:solidFill>
-            <a:srgbClr val="FFFFFF"/>
-          </a:solidFill>
-          <a:ln>
-            <a:noFill/>
-          </a:ln>
-        </p:spPr>
-        <p:txBody>
-          <a:bodyPr/>
-          <a:lstStyle/>
-          <a:p>
-            <a:endParaRPr/>
-          </a:p>
-        </p:txBody>
-      </p:sp>
-      <p:sp>
-        <p:nvSpPr>
-          <p:cNvPr id="3" name="TextBox 2"/>
-          <p:cNvSpPr txBox="1"/>
-          <p:nvPr/>
-        </p:nvSpPr>
-        <p:spPr>
-          <a:xfrm>
-            <a:off x="822960" y="502920"/>
-            <a:ext cx="10515600" cy="822960"/>
-          </a:xfrm>
-          <a:prstGeom prst="rect">
-            <a:avLst/>
-          </a:prstGeom>
-          <a:noFill/>
-        </p:spPr>
-        <p:txBody>
-          <a:bodyPr wrap="square">
-            <a:spAutoFit/>
-          </a:bodyPr>
-          <a:lstStyle/>
-          <a:p>
-            <a:pPr algn="l">
-              <a:spcAft>
-                <a:spcPts val="600"/>
-              </a:spcAft>
-            </a:pPr>
-            <a:r>
-              <a:rPr sz="2800" b="1" i="0">
-                <a:solidFill>
-                  <a:srgbClr val="2C5F2D"/>
-                </a:solidFill>
-                <a:latin typeface="Cambria"/>
-              </a:rPr>
-              <a:t>Your Take-Home Card — This Session’s Practice</a:t>
-            </a:r>
-          </a:p>
-        </p:txBody>
-      </p:sp>
-      <p:sp>
-        <p:nvSpPr>
-          <p:cNvPr id="90" name="SlideNum"/>
-          <p:cNvSpPr txBox="1"/>
-          <p:nvPr/>
-        </p:nvSpPr>
-        <p:spPr>
-          <a:xfrm>
-            <a:off x="11384280" y="6446520"/>
-            <a:ext cx="640080" cy="292608"/>
-          </a:xfrm>
-          <a:prstGeom prst="rect">
-            <a:avLst/>
-          </a:prstGeom>
-          <a:noFill/>
-        </p:spPr>
-        <p:txBody>
-          <a:bodyPr wrap="none" lIns="0" tIns="0" rIns="45720" bIns="0" anchor="ctr"/>
-          <a:lstStyle/>
-          <a:p>
-            <a:pPr algn="r"/>
-            <a:r>
-              <a:t>56</a:t>
-            </a:r>
-            <a:endParaRPr sz="1000" b="1">
-              <a:solidFill>
-                <a:srgbClr val="7A8A6E"/>
-              </a:solidFill>
-              <a:latin typeface="Calibri"/>
-            </a:endParaRPr>
-          </a:p>
-        </p:txBody>
-      </p:sp>
-      <p:pic>
-        <p:nvPicPr>
-          <p:cNvPr id="270" name="CardImage" descr="the Week 4 check-off card, as handed out"/>
-          <p:cNvPicPr>
-            <a:picLocks noChangeAspect="1"/>
-          </p:cNvPicPr>
-          <p:nvPr/>
-        </p:nvPicPr>
-        <p:blipFill>
-          <a:blip r:embed="rId3"/>
-          <a:stretch>
-            <a:fillRect/>
-          </a:stretch>
-        </p:blipFill>
-        <p:spPr>
-          <a:xfrm>
-            <a:off x="1158087" y="1554480"/>
-            <a:ext cx="9875520" cy="4430989"/>
-          </a:xfrm>
-          <a:prstGeom prst="rect">
-            <a:avLst/>
-          </a:prstGeom>
-          <a:ln w="76200">
-            <a:solidFill>
-              <a:srgbClr val="FFFFFF"/>
-            </a:solidFill>
-          </a:ln>
-          <a:effectLst>
-            <a:outerShdw blurRad="63500" dist="25400" dir="5400000" rotWithShape="0">
-              <a:srgbClr val="000000">
-                <a:alpha val="35000"/>
-              </a:srgbClr>
-            </a:outerShdw>
-          </a:effectLst>
-        </p:spPr>
-      </p:pic>
-      <p:sp>
-        <p:nvSpPr>
-          <p:cNvPr id="271" name="Caption"/>
-          <p:cNvSpPr txBox="1"/>
-          <p:nvPr/>
-        </p:nvSpPr>
-        <p:spPr>
-          <a:xfrm>
-            <a:off x="822960" y="6168349"/>
-            <a:ext cx="10515600" cy="457200"/>
-          </a:xfrm>
-          <a:prstGeom prst="rect">
-            <a:avLst/>
-          </a:prstGeom>
-          <a:noFill/>
-        </p:spPr>
-        <p:txBody>
-          <a:bodyPr wrap="square"/>
-          <a:lstStyle/>
-          <a:p>
-            <a:pPr algn="ctr"/>
-            <a:r>
-              <a:rPr sz="1800" b="0" i="1">
-                <a:solidFill>
-                  <a:srgbClr val="222B22"/>
-                </a:solidFill>
-                <a:latin typeface="Calibri"/>
-              </a:rPr>
-              <a:t>Handed out now — fridge, mirror, journal pocket.</a:t>
-            </a:r>
-          </a:p>
-        </p:txBody>
-      </p:sp>
-    </p:spTree>
-  </p:cSld>
-  <p:clrMapOvr>
-    <a:masterClrMapping/>
-  </p:clrMapOvr>
-</p:sld>
-</file>
-
-<file path=ppt/slides/slide57.xml><?xml version="1.0" encoding="utf-8"?>
-<p:sld xmlns:a="http://schemas.openxmlformats.org/drawingml/2006/main" xmlns:r="http://schemas.openxmlformats.org/officeDocument/2006/relationships" xmlns:p="http://schemas.openxmlformats.org/presentationml/2006/main">
-  <p:cSld>
-    <p:spTree>
-      <p:nvGrpSpPr>
-        <p:cNvPr id="1" name=""/>
-        <p:cNvGrpSpPr/>
-        <p:nvPr/>
-      </p:nvGrpSpPr>
-      <p:grpSpPr>
-        <a:xfrm>
-          <a:off x="0" y="0"/>
-          <a:ext cx="0" cy="0"/>
-          <a:chOff x="0" y="0"/>
-          <a:chExt cx="0" cy="0"/>
-        </a:xfrm>
-      </p:grpSpPr>
-      <p:sp>
-        <p:nvSpPr>
-          <p:cNvPr id="2" name="Rectangle 1"/>
-          <p:cNvSpPr/>
-          <p:nvPr/>
-        </p:nvSpPr>
-        <p:spPr>
-          <a:xfrm>
-            <a:off x="0" y="0"/>
-            <a:ext cx="12191695" cy="6858000"/>
-          </a:xfrm>
-          <a:prstGeom prst="rect">
-            <a:avLst/>
-          </a:prstGeom>
-          <a:solidFill>
-            <a:srgbClr val="FFFFFF"/>
-          </a:solidFill>
-          <a:ln>
-            <a:noFill/>
-          </a:ln>
-        </p:spPr>
-        <p:txBody>
-          <a:bodyPr/>
-          <a:lstStyle/>
-          <a:p>
-            <a:endParaRPr/>
-          </a:p>
-        </p:txBody>
-      </p:sp>
-      <p:sp>
-        <p:nvSpPr>
-          <p:cNvPr id="3" name="TextBox 2"/>
-          <p:cNvSpPr txBox="1"/>
-          <p:nvPr/>
-        </p:nvSpPr>
-        <p:spPr>
-          <a:xfrm>
-            <a:off x="822960" y="502920"/>
-            <a:ext cx="10515600" cy="822960"/>
-          </a:xfrm>
-          <a:prstGeom prst="rect">
-            <a:avLst/>
-          </a:prstGeom>
-          <a:noFill/>
-        </p:spPr>
-        <p:txBody>
-          <a:bodyPr wrap="square">
-            <a:spAutoFit/>
-          </a:bodyPr>
-          <a:lstStyle/>
-          <a:p>
-            <a:pPr algn="l">
-              <a:spcAft>
-                <a:spcPts val="600"/>
-              </a:spcAft>
-            </a:pPr>
-            <a:r>
-              <a:rPr sz="2800" b="1" i="0">
-                <a:solidFill>
-                  <a:srgbClr val="2C5F2D"/>
-                </a:solidFill>
-                <a:latin typeface="Cambria"/>
-              </a:rPr>
-              <a:t>The Leader Feedback Round</a:t>
-            </a:r>
-          </a:p>
-        </p:txBody>
-      </p:sp>
-      <p:sp>
-        <p:nvSpPr>
-          <p:cNvPr id="4" name="TextBox 4"/>
-          <p:cNvSpPr txBox="1"/>
-          <p:nvPr/>
-        </p:nvSpPr>
-        <p:spPr>
-          <a:xfrm>
-            <a:off x="822960" y="1554480"/>
-            <a:ext cx="6675120" cy="4892040"/>
-          </a:xfrm>
-          <a:prstGeom prst="rect">
-            <a:avLst/>
-          </a:prstGeom>
-          <a:noFill/>
-        </p:spPr>
-        <p:txBody>
-          <a:bodyPr wrap="square" lIns="91440" tIns="91440" rIns="91440" bIns="91440"/>
-          <a:lstStyle/>
-          <a:p>
-            <a:pPr marL="274320" indent="-274320">
-              <a:spcAft>
-                <a:spcPts val="900"/>
-              </a:spcAft>
-            </a:pPr>
-            <a:r>
-              <a:rPr sz="2800" b="1" i="0">
-                <a:solidFill>
-                  <a:srgbClr val="97BC62"/>
-                </a:solidFill>
-                <a:latin typeface="Calibri"/>
-              </a:rPr>
-              <a:t>•  </a:t>
-            </a:r>
-            <a:r>
-              <a:rPr sz="2800" b="0" i="0">
-                <a:solidFill>
-                  <a:srgbClr val="222B22"/>
-                </a:solidFill>
-                <a:latin typeface="Calibri"/>
-              </a:rPr>
-              <a:t>Two rounds, same as every session — the container holder first, then the content presenter: three things each</a:t>
-            </a:r>
-          </a:p>
-          <a:p>
-            <a:pPr marL="685800" indent="-274320">
-              <a:spcAft>
-                <a:spcPts val="700"/>
-              </a:spcAft>
-            </a:pPr>
-            <a:r>
-              <a:rPr sz="2000" b="1" i="0">
-                <a:solidFill>
-                  <a:srgbClr val="97BC62"/>
-                </a:solidFill>
-                <a:latin typeface="Calibri"/>
-              </a:rPr>
-              <a:t>–  </a:t>
-            </a:r>
-            <a:r>
-              <a:rPr sz="2000" b="0" i="1">
-                <a:solidFill>
-                  <a:srgbClr val="222B22"/>
-                </a:solidFill>
-                <a:latin typeface="Calibri"/>
-              </a:rPr>
-              <a:t>“What I think went well tonight: ______”</a:t>
-            </a:r>
-          </a:p>
-          <a:p>
-            <a:pPr marL="685800" indent="-274320">
-              <a:spcAft>
-                <a:spcPts val="700"/>
-              </a:spcAft>
-            </a:pPr>
-            <a:r>
-              <a:rPr sz="2000" b="1" i="0">
-                <a:solidFill>
-                  <a:srgbClr val="97BC62"/>
-                </a:solidFill>
-                <a:latin typeface="Calibri"/>
-              </a:rPr>
-              <a:t>–  </a:t>
-            </a:r>
-            <a:r>
-              <a:rPr sz="2000" b="0" i="1">
-                <a:solidFill>
-                  <a:srgbClr val="222B22"/>
-                </a:solidFill>
-                <a:latin typeface="Calibri"/>
-              </a:rPr>
-              <a:t>“What I’d do differently next time: ______”</a:t>
-            </a:r>
-          </a:p>
-          <a:p>
-            <a:pPr marL="685800" indent="-274320">
-              <a:spcAft>
-                <a:spcPts val="700"/>
-              </a:spcAft>
-            </a:pPr>
-            <a:r>
-              <a:rPr sz="2000" b="1" i="0">
-                <a:solidFill>
-                  <a:srgbClr val="97BC62"/>
-                </a:solidFill>
-                <a:latin typeface="Calibri"/>
-              </a:rPr>
-              <a:t>–  </a:t>
-            </a:r>
-            <a:r>
-              <a:rPr sz="2000" b="0" i="1">
-                <a:solidFill>
-                  <a:srgbClr val="222B22"/>
-                </a:solidFill>
-                <a:latin typeface="Calibri"/>
-              </a:rPr>
-              <a:t>“If I were to teach tonight’s process to someone, I would tell them: ______”</a:t>
-            </a:r>
-          </a:p>
-          <a:p>
-            <a:pPr marL="274320" indent="-274320">
-              <a:spcAft>
-                <a:spcPts val="900"/>
-              </a:spcAft>
-            </a:pPr>
-            <a:r>
-              <a:rPr sz="2800" b="1" i="0">
-                <a:solidFill>
-                  <a:srgbClr val="97BC62"/>
-                </a:solidFill>
-                <a:latin typeface="Calibri"/>
-              </a:rPr>
-              <a:t>•  </a:t>
-            </a:r>
-            <a:r>
-              <a:rPr sz="2800" b="0" i="0">
-                <a:solidFill>
-                  <a:srgbClr val="222B22"/>
-                </a:solidFill>
-                <a:latin typeface="Calibri"/>
-              </a:rPr>
-              <a:t>Then the room — the same two questions about tonight</a:t>
-            </a:r>
-          </a:p>
-          <a:p>
-            <a:pPr marL="274320" indent="-274320">
-              <a:spcAft>
-                <a:spcPts val="900"/>
-              </a:spcAft>
-            </a:pPr>
-            <a:r>
-              <a:rPr sz="2800" b="1" i="0">
-                <a:solidFill>
-                  <a:srgbClr val="97BC62"/>
-                </a:solidFill>
-                <a:latin typeface="Calibri"/>
-              </a:rPr>
-              <a:t>•  </a:t>
-            </a:r>
-            <a:r>
-              <a:rPr sz="2800" b="0" i="0">
-                <a:solidFill>
-                  <a:srgbClr val="222B22"/>
-                </a:solidFill>
-                <a:latin typeface="Calibri"/>
-              </a:rPr>
-              <a:t>The leaders receive without defending — “thank you” is the whole response</a:t>
-            </a:r>
-          </a:p>
-        </p:txBody>
-      </p:sp>
-      <p:sp>
-        <p:nvSpPr>
-          <p:cNvPr id="90" name="SlideNum"/>
-          <p:cNvSpPr txBox="1"/>
-          <p:nvPr/>
-        </p:nvSpPr>
-        <p:spPr>
-          <a:xfrm>
-            <a:off x="11384280" y="6446520"/>
-            <a:ext cx="640080" cy="292608"/>
-          </a:xfrm>
-          <a:prstGeom prst="rect">
-            <a:avLst/>
-          </a:prstGeom>
-          <a:noFill/>
-        </p:spPr>
-        <p:txBody>
-          <a:bodyPr wrap="none" lIns="0" tIns="0" rIns="45720" bIns="0" anchor="ctr"/>
-          <a:lstStyle/>
-          <a:p>
-            <a:pPr algn="r"/>
-            <a:r>
-              <a:t>57</a:t>
-            </a:r>
-            <a:endParaRPr sz="1000" b="1">
-              <a:solidFill>
-                <a:srgbClr val="7A8A6E"/>
-              </a:solidFill>
-              <a:latin typeface="Calibri"/>
-            </a:endParaRPr>
-          </a:p>
-        </p:txBody>
-      </p:sp>
-      <p:pic>
-        <p:nvPicPr>
-          <p:cNvPr id="33" name="Picture 33" descr="compass on the trail - the weekly bearing check"/>
-          <p:cNvPicPr>
-            <a:picLocks noChangeAspect="1"/>
-          </p:cNvPicPr>
-          <p:nvPr/>
-        </p:nvPicPr>
-        <p:blipFill>
-          <a:blip r:embed="rId3"/>
-          <a:stretch>
-            <a:fillRect/>
-          </a:stretch>
-        </p:blipFill>
-        <p:spPr>
-          <a:xfrm>
-            <a:off x="8106160" y="1463040"/>
-            <a:ext cx="3259831" cy="4892040"/>
-          </a:xfrm>
-          <a:prstGeom prst="rect">
-            <a:avLst/>
-          </a:prstGeom>
-          <a:ln w="76200">
-            <a:solidFill>
-              <a:srgbClr val="FFFFFF"/>
-            </a:solidFill>
-          </a:ln>
-          <a:effectLst>
-            <a:outerShdw blurRad="63500" dist="25400" dir="5400000" rotWithShape="0">
-              <a:srgbClr val="000000">
-                <a:alpha val="35000"/>
-              </a:srgbClr>
-            </a:outerShdw>
-          </a:effectLst>
-        </p:spPr>
-      </p:pic>
-    </p:spTree>
-  </p:cSld>
-  <p:clrMapOvr>
-    <a:masterClrMapping/>
-  </p:clrMapOvr>
-</p:sld>
-</file>
-
-<file path=ppt/slides/slide58.xml><?xml version="1.0" encoding="utf-8"?>
-<p:sld xmlns:a="http://schemas.openxmlformats.org/drawingml/2006/main" xmlns:r="http://schemas.openxmlformats.org/officeDocument/2006/relationships" xmlns:p="http://schemas.openxmlformats.org/presentationml/2006/main">
-  <p:cSld>
-    <p:spTree>
-      <p:nvGrpSpPr>
-        <p:cNvPr id="1" name=""/>
-        <p:cNvGrpSpPr/>
-        <p:nvPr/>
-      </p:nvGrpSpPr>
-      <p:grpSpPr>
-        <a:xfrm>
-          <a:off x="0" y="0"/>
-          <a:ext cx="0" cy="0"/>
-          <a:chOff x="0" y="0"/>
-          <a:chExt cx="0" cy="0"/>
-        </a:xfrm>
-      </p:grpSpPr>
-      <p:sp>
-        <p:nvSpPr>
-          <p:cNvPr id="2" name="Rectangle 1"/>
-          <p:cNvSpPr/>
-          <p:nvPr/>
-        </p:nvSpPr>
-        <p:spPr>
-          <a:xfrm>
-            <a:off x="0" y="0"/>
-            <a:ext cx="12191695" cy="6858000"/>
-          </a:xfrm>
-          <a:prstGeom prst="rect">
-            <a:avLst/>
-          </a:prstGeom>
-          <a:solidFill>
-            <a:srgbClr val="FFFFFF"/>
-          </a:solidFill>
-          <a:ln>
-            <a:noFill/>
-          </a:ln>
-        </p:spPr>
-        <p:txBody>
-          <a:bodyPr/>
-          <a:lstStyle/>
-          <a:p>
-            <a:endParaRPr/>
-          </a:p>
-        </p:txBody>
-      </p:sp>
-      <p:sp>
-        <p:nvSpPr>
-          <p:cNvPr id="3" name="TextBox 2"/>
-          <p:cNvSpPr txBox="1"/>
-          <p:nvPr/>
-        </p:nvSpPr>
-        <p:spPr>
-          <a:xfrm>
-            <a:off x="822960" y="502920"/>
-            <a:ext cx="10515600" cy="822960"/>
-          </a:xfrm>
-          <a:prstGeom prst="rect">
-            <a:avLst/>
-          </a:prstGeom>
-          <a:noFill/>
-        </p:spPr>
-        <p:txBody>
-          <a:bodyPr wrap="square">
-            <a:spAutoFit/>
-          </a:bodyPr>
-          <a:lstStyle/>
-          <a:p>
-            <a:pPr algn="l">
-              <a:spcAft>
-                <a:spcPts val="600"/>
-              </a:spcAft>
-            </a:pPr>
-            <a:r>
-              <a:rPr sz="2800" b="1" i="0">
-                <a:solidFill>
-                  <a:srgbClr val="2C5F2D"/>
-                </a:solidFill>
-                <a:latin typeface="Cambria"/>
-              </a:rPr>
-              <a:t>Closing the Container + Aaronic Blessing</a:t>
-            </a:r>
-          </a:p>
-        </p:txBody>
-      </p:sp>
-      <p:sp>
-        <p:nvSpPr>
-          <p:cNvPr id="4" name="TextBox 4"/>
-          <p:cNvSpPr txBox="1"/>
-          <p:nvPr/>
-        </p:nvSpPr>
-        <p:spPr>
-          <a:xfrm>
-            <a:off x="822960" y="1600200"/>
-            <a:ext cx="5669280" cy="4572000"/>
-          </a:xfrm>
-          <a:prstGeom prst="rect">
-            <a:avLst/>
-          </a:prstGeom>
-          <a:noFill/>
-        </p:spPr>
-        <p:txBody>
-          <a:bodyPr wrap="square" lIns="91440" tIns="91440" rIns="91440" bIns="91440"/>
-          <a:lstStyle/>
-          <a:p>
-            <a:pPr marL="274320" indent="-274320">
-              <a:spcAft>
-                <a:spcPts val="900"/>
-              </a:spcAft>
-            </a:pPr>
-            <a:r>
-              <a:rPr sz="2200" b="1" i="0">
-                <a:solidFill>
-                  <a:srgbClr val="97BC62"/>
-                </a:solidFill>
-                <a:latin typeface="Calibri"/>
-              </a:rPr>
-              <a:t>•  </a:t>
-            </a:r>
-            <a:r>
-              <a:rPr sz="2200" b="0" i="0">
-                <a:solidFill>
-                  <a:srgbClr val="222B22"/>
-                </a:solidFill>
-                <a:latin typeface="Calibri"/>
-              </a:rPr>
-              <a:t>We close the way we opened — the container, six steps:</a:t>
-            </a:r>
-          </a:p>
-          <a:p>
-            <a:pPr marL="685800" indent="-274320">
-              <a:spcAft>
-                <a:spcPts val="700"/>
-              </a:spcAft>
-            </a:pPr>
-            <a:r>
-              <a:rPr sz="2000" b="1" i="0">
-                <a:solidFill>
-                  <a:srgbClr val="97BC62"/>
-                </a:solidFill>
-                <a:latin typeface="Calibri"/>
-              </a:rPr>
-              <a:t>1   </a:t>
-            </a:r>
-            <a:r>
-              <a:rPr sz="2000" b="0" i="0">
-                <a:solidFill>
-                  <a:srgbClr val="222B22"/>
-                </a:solidFill>
-                <a:latin typeface="Calibri"/>
-              </a:rPr>
-              <a:t>Stand again — same circle, same posture as the open</a:t>
-            </a:r>
-          </a:p>
-          <a:p>
-            <a:pPr marL="685800" indent="-274320">
-              <a:spcAft>
-                <a:spcPts val="700"/>
-              </a:spcAft>
-            </a:pPr>
-            <a:r>
-              <a:rPr sz="2000" b="1" i="0">
-                <a:solidFill>
-                  <a:srgbClr val="97BC62"/>
-                </a:solidFill>
-                <a:latin typeface="Calibri"/>
-              </a:rPr>
-              <a:t>2   </a:t>
-            </a:r>
-            <a:r>
-              <a:rPr sz="2000" b="0" i="0">
-                <a:solidFill>
-                  <a:srgbClr val="222B22"/>
-                </a:solidFill>
-                <a:latin typeface="Calibri"/>
-              </a:rPr>
-              <a:t>One-word landing — compare it to your opening word</a:t>
-            </a:r>
-          </a:p>
-          <a:p>
-            <a:pPr marL="685800" indent="-274320">
-              <a:spcAft>
-                <a:spcPts val="700"/>
-              </a:spcAft>
-            </a:pPr>
-            <a:r>
-              <a:rPr sz="2000" b="1" i="0">
-                <a:solidFill>
-                  <a:srgbClr val="97BC62"/>
-                </a:solidFill>
-                <a:latin typeface="Calibri"/>
-              </a:rPr>
-              <a:t>3   </a:t>
-            </a:r>
-            <a:r>
-              <a:rPr sz="2000" b="0" i="0">
-                <a:solidFill>
-                  <a:srgbClr val="222B22"/>
-                </a:solidFill>
-                <a:latin typeface="Calibri"/>
-              </a:rPr>
-              <a:t>The one thing you are taking from tonight</a:t>
-            </a:r>
-          </a:p>
-          <a:p>
-            <a:pPr marL="685800" indent="-274320">
-              <a:spcAft>
-                <a:spcPts val="700"/>
-              </a:spcAft>
-            </a:pPr>
-            <a:r>
-              <a:rPr sz="2000" b="1" i="0">
-                <a:solidFill>
-                  <a:srgbClr val="97BC62"/>
-                </a:solidFill>
-                <a:latin typeface="Calibri"/>
-              </a:rPr>
-              <a:t>4   </a:t>
-            </a:r>
-            <a:r>
-              <a:rPr sz="2000" b="0" i="0">
-                <a:solidFill>
-                  <a:srgbClr val="222B22"/>
-                </a:solidFill>
-                <a:latin typeface="Calibri"/>
-              </a:rPr>
-              <a:t>The one practice — committed aloud, or modified to one you will actually keep</a:t>
-            </a:r>
-          </a:p>
-          <a:p>
-            <a:pPr marL="685800" indent="-274320">
-              <a:spcAft>
-                <a:spcPts val="700"/>
-              </a:spcAft>
-            </a:pPr>
-            <a:r>
-              <a:rPr sz="2000" b="1" i="0">
-                <a:solidFill>
-                  <a:srgbClr val="97BC62"/>
-                </a:solidFill>
-                <a:latin typeface="Calibri"/>
-              </a:rPr>
-              <a:t>5   </a:t>
-            </a:r>
-            <a:r>
-              <a:rPr sz="2000" b="0" i="0">
-                <a:solidFill>
-                  <a:srgbClr val="222B22"/>
-                </a:solidFill>
-                <a:latin typeface="Calibri"/>
-              </a:rPr>
-              <a:t>Blessings — specific, witnessed, short</a:t>
-            </a:r>
-          </a:p>
-          <a:p>
-            <a:pPr marL="685800" indent="-274320">
-              <a:spcAft>
-                <a:spcPts val="700"/>
-              </a:spcAft>
-            </a:pPr>
-            <a:r>
-              <a:rPr sz="2000" b="1" i="0">
-                <a:solidFill>
-                  <a:srgbClr val="97BC62"/>
-                </a:solidFill>
-                <a:latin typeface="Calibri"/>
-              </a:rPr>
-              <a:t>6   </a:t>
-            </a:r>
-            <a:r>
-              <a:rPr sz="2000" b="0" i="0">
-                <a:solidFill>
-                  <a:srgbClr val="222B22"/>
-                </a:solidFill>
-                <a:latin typeface="Calibri"/>
-              </a:rPr>
-              <a:t>Closing prayer — and the Aaronic blessing, spoken over each other, face to face</a:t>
-            </a:r>
-          </a:p>
-        </p:txBody>
-      </p:sp>
-      <p:sp>
-        <p:nvSpPr>
-          <p:cNvPr id="6" name="TextBox 6"/>
-          <p:cNvSpPr txBox="1"/>
-          <p:nvPr/>
-        </p:nvSpPr>
-        <p:spPr>
-          <a:xfrm>
-            <a:off x="6766560" y="1737360"/>
-            <a:ext cx="4663440" cy="2926080"/>
-          </a:xfrm>
-          <a:prstGeom prst="rect">
-            <a:avLst/>
-          </a:prstGeom>
-          <a:solidFill>
-            <a:srgbClr val="F1F6EC"/>
-          </a:solidFill>
-        </p:spPr>
-        <p:txBody>
-          <a:bodyPr wrap="square" lIns="91440" tIns="91440" rIns="91440" bIns="91440" anchor="ctr"/>
-          <a:lstStyle/>
-          <a:p>
-            <a:pPr>
-              <a:spcAft>
-                <a:spcPts val="900"/>
-              </a:spcAft>
-            </a:pPr>
-            <a:r>
-              <a:rPr sz="1200" b="1" i="0">
-                <a:solidFill>
-                  <a:srgbClr val="97BC62"/>
-                </a:solidFill>
-                <a:latin typeface="Calibri"/>
-              </a:rPr>
-              <a:t>THE AARONIC BLESSING — NUMBERS 6:24–26</a:t>
-            </a:r>
-          </a:p>
-          <a:p>
-            <a:pPr>
-              <a:spcAft>
-                <a:spcPts val="600"/>
-              </a:spcAft>
-            </a:pPr>
-            <a:r>
-              <a:rPr sz="2400" b="0" i="1">
-                <a:solidFill>
-                  <a:srgbClr val="222B22"/>
-                </a:solidFill>
-                <a:latin typeface="Cambria"/>
-              </a:rPr>
-              <a:t>“The Lord bless you and keep you;</a:t>
-            </a:r>
-          </a:p>
-          <a:p>
-            <a:pPr>
-              <a:spcAft>
-                <a:spcPts val="600"/>
-              </a:spcAft>
-            </a:pPr>
-            <a:r>
-              <a:rPr sz="2400" b="0" i="1">
-                <a:solidFill>
-                  <a:srgbClr val="222B22"/>
-                </a:solidFill>
-                <a:latin typeface="Cambria"/>
-              </a:rPr>
-              <a:t>the Lord make his face to shine upon you, and be gracious to you;</a:t>
-            </a:r>
-          </a:p>
-          <a:p>
-            <a:pPr>
-              <a:spcAft>
-                <a:spcPts val="600"/>
-              </a:spcAft>
-            </a:pPr>
-            <a:r>
-              <a:rPr sz="2400" b="0" i="1">
-                <a:solidFill>
-                  <a:srgbClr val="222B22"/>
-                </a:solidFill>
-                <a:latin typeface="Cambria"/>
-              </a:rPr>
-              <a:t>the Lord lift up his countenance upon you, and give you peace.”</a:t>
-            </a:r>
-          </a:p>
-        </p:txBody>
-      </p:sp>
-      <p:sp>
-        <p:nvSpPr>
-          <p:cNvPr id="90" name="SlideNum"/>
-          <p:cNvSpPr txBox="1"/>
-          <p:nvPr/>
-        </p:nvSpPr>
-        <p:spPr>
-          <a:xfrm>
-            <a:off x="11384280" y="6446520"/>
-            <a:ext cx="640080" cy="292608"/>
-          </a:xfrm>
-          <a:prstGeom prst="rect">
-            <a:avLst/>
-          </a:prstGeom>
-          <a:noFill/>
-        </p:spPr>
-        <p:txBody>
-          <a:bodyPr wrap="none" lIns="0" tIns="0" rIns="45720" bIns="0" anchor="ctr"/>
-          <a:lstStyle/>
-          <a:p>
-            <a:pPr algn="r"/>
-            <a:r>
-              <a:t>58</a:t>
             </a:r>
             <a:endParaRPr sz="1000" b="1">
               <a:solidFill>

--- a/_implementation-notes/evening-series/FotH Evening Session 4 Slides DRAFT v1.pptx
+++ b/_implementation-notes/evening-series/FotH Evening Session 4 Slides DRAFT v1.pptx
@@ -5032,6 +5032,253 @@
                 </a:solidFill>
                 <a:latin typeface="Cambria"/>
               </a:rPr>
+              <a:t>Merge and One-Word Landing</a:t>
+            </a:r>
+          </a:p>
+        </p:txBody>
+      </p:sp>
+      <p:sp>
+        <p:nvSpPr>
+          <p:cNvPr id="4" name="TextBox 4"/>
+          <p:cNvSpPr txBox="1"/>
+          <p:nvPr/>
+        </p:nvSpPr>
+        <p:spPr>
+          <a:xfrm>
+            <a:off x="822960" y="1554480"/>
+            <a:ext cx="10515600" cy="4892040"/>
+          </a:xfrm>
+          <a:prstGeom prst="rect">
+            <a:avLst/>
+          </a:prstGeom>
+          <a:noFill/>
+        </p:spPr>
+        <p:txBody>
+          <a:bodyPr wrap="square" lIns="91440" tIns="91440" rIns="91440" bIns="91440"/>
+          <a:lstStyle/>
+          <a:p>
+            <a:pPr marL="274320" indent="-274320">
+              <a:spcAft>
+                <a:spcPts val="900"/>
+              </a:spcAft>
+            </a:pPr>
+            <a:r>
+              <a:rPr sz="2800" b="1" i="0" dirty="0">
+                <a:solidFill>
+                  <a:srgbClr val="97BC62"/>
+                </a:solidFill>
+                <a:latin typeface="Calibri"/>
+              </a:rPr>
+              <a:t>•  </a:t>
+            </a:r>
+            <a:r>
+              <a:rPr sz="2800" b="0" i="0" dirty="0">
+                <a:solidFill>
+                  <a:srgbClr val="222B22"/>
+                </a:solidFill>
+                <a:latin typeface="Calibri"/>
+              </a:rPr>
+              <a:t>What happened in your pair stays in your pair</a:t>
+            </a:r>
+          </a:p>
+          <a:p>
+            <a:pPr marL="274320" indent="-274320">
+              <a:spcAft>
+                <a:spcPts val="900"/>
+              </a:spcAft>
+            </a:pPr>
+            <a:r>
+              <a:rPr sz="2800" b="1" i="0" dirty="0">
+                <a:solidFill>
+                  <a:srgbClr val="97BC62"/>
+                </a:solidFill>
+                <a:latin typeface="Calibri"/>
+              </a:rPr>
+              <a:t>•  </a:t>
+            </a:r>
+            <a:r>
+              <a:rPr sz="2800" b="0" i="0" dirty="0">
+                <a:solidFill>
+                  <a:srgbClr val="222B22"/>
+                </a:solidFill>
+                <a:latin typeface="Calibri"/>
+              </a:rPr>
+              <a:t>One word, when you’re ready, about what tonight was like — an arranged parent starts. You can pass</a:t>
+            </a:r>
+          </a:p>
+          <a:p>
+            <a:pPr marL="274320" indent="-274320">
+              <a:spcAft>
+                <a:spcPts val="900"/>
+              </a:spcAft>
+            </a:pPr>
+            <a:r>
+              <a:rPr sz="2800" b="1" i="0" dirty="0">
+                <a:solidFill>
+                  <a:srgbClr val="97BC62"/>
+                </a:solidFill>
+                <a:latin typeface="Calibri"/>
+              </a:rPr>
+              <a:t>•  </a:t>
+            </a:r>
+            <a:r>
+              <a:rPr sz="2800" b="0" i="0" dirty="0">
+                <a:solidFill>
+                  <a:srgbClr val="222B22"/>
+                </a:solidFill>
+                <a:latin typeface="Calibri"/>
+              </a:rPr>
+              <a:t>“The round is complete — every person in this room, parent and teen, has now told a piece of their story to a circle that blessed them for it.”</a:t>
+            </a:r>
+          </a:p>
+          <a:p>
+            <a:pPr marL="274320" indent="-274320">
+              <a:spcAft>
+                <a:spcPts val="900"/>
+              </a:spcAft>
+            </a:pPr>
+            <a:r>
+              <a:rPr sz="2800" b="1" i="0" dirty="0">
+                <a:solidFill>
+                  <a:srgbClr val="97BC62"/>
+                </a:solidFill>
+                <a:latin typeface="Calibri"/>
+              </a:rPr>
+              <a:t>•  </a:t>
+            </a:r>
+            <a:r>
+              <a:rPr sz="2800" b="0" i="0" dirty="0">
+                <a:solidFill>
+                  <a:srgbClr val="222B22"/>
+                </a:solidFill>
+                <a:latin typeface="Calibri"/>
+              </a:rPr>
+              <a:t>“Rooms like this one are rare. They’re also the kind of room God shows up in.”</a:t>
+            </a:r>
+          </a:p>
+        </p:txBody>
+      </p:sp>
+      <p:sp>
+        <p:nvSpPr>
+          <p:cNvPr id="90" name="SlideNum"/>
+          <p:cNvSpPr txBox="1"/>
+          <p:nvPr/>
+        </p:nvSpPr>
+        <p:spPr>
+          <a:xfrm>
+            <a:off x="11384280" y="6446520"/>
+            <a:ext cx="640080" cy="292608"/>
+          </a:xfrm>
+          <a:prstGeom prst="rect">
+            <a:avLst/>
+          </a:prstGeom>
+          <a:noFill/>
+        </p:spPr>
+        <p:txBody>
+          <a:bodyPr wrap="none" lIns="0" tIns="0" rIns="45720" bIns="0" anchor="ctr"/>
+          <a:lstStyle/>
+          <a:p>
+            <a:pPr algn="r"/>
+            <a:r>
+              <a:t>54</a:t>
+            </a:r>
+            <a:endParaRPr sz="1000" b="1">
+              <a:solidFill>
+                <a:srgbClr val="7A8A6E"/>
+              </a:solidFill>
+              <a:latin typeface="Calibri"/>
+            </a:endParaRPr>
+          </a:p>
+        </p:txBody>
+      </p:sp>
+    </p:spTree>
+  </p:cSld>
+  <p:clrMapOvr>
+    <a:masterClrMapping/>
+  </p:clrMapOvr>
+</p:sld>
+</file>
+
+<file path=ppt/slides/slide11.xml><?xml version="1.0" encoding="utf-8"?>
+<p:sld xmlns:a="http://schemas.openxmlformats.org/drawingml/2006/main" xmlns:r="http://schemas.openxmlformats.org/officeDocument/2006/relationships" xmlns:p="http://schemas.openxmlformats.org/presentationml/2006/main">
+  <p:cSld>
+    <p:spTree>
+      <p:nvGrpSpPr>
+        <p:cNvPr id="1" name=""/>
+        <p:cNvGrpSpPr/>
+        <p:nvPr/>
+      </p:nvGrpSpPr>
+      <p:grpSpPr>
+        <a:xfrm>
+          <a:off x="0" y="0"/>
+          <a:ext cx="0" cy="0"/>
+          <a:chOff x="0" y="0"/>
+          <a:chExt cx="0" cy="0"/>
+        </a:xfrm>
+      </p:grpSpPr>
+      <p:sp>
+        <p:nvSpPr>
+          <p:cNvPr id="2" name="Rectangle 1"/>
+          <p:cNvSpPr/>
+          <p:nvPr/>
+        </p:nvSpPr>
+        <p:spPr>
+          <a:xfrm>
+            <a:off x="0" y="0"/>
+            <a:ext cx="12191695" cy="6858000"/>
+          </a:xfrm>
+          <a:prstGeom prst="rect">
+            <a:avLst/>
+          </a:prstGeom>
+          <a:solidFill>
+            <a:srgbClr val="FFFFFF"/>
+          </a:solidFill>
+          <a:ln>
+            <a:noFill/>
+          </a:ln>
+        </p:spPr>
+        <p:txBody>
+          <a:bodyPr/>
+          <a:lstStyle/>
+          <a:p>
+            <a:endParaRPr/>
+          </a:p>
+        </p:txBody>
+      </p:sp>
+      <p:sp>
+        <p:nvSpPr>
+          <p:cNvPr id="3" name="TextBox 2"/>
+          <p:cNvSpPr txBox="1"/>
+          <p:nvPr/>
+        </p:nvSpPr>
+        <p:spPr>
+          <a:xfrm>
+            <a:off x="822960" y="502920"/>
+            <a:ext cx="10515600" cy="822960"/>
+          </a:xfrm>
+          <a:prstGeom prst="rect">
+            <a:avLst/>
+          </a:prstGeom>
+          <a:noFill/>
+        </p:spPr>
+        <p:txBody>
+          <a:bodyPr wrap="square">
+            <a:spAutoFit/>
+          </a:bodyPr>
+          <a:lstStyle/>
+          <a:p>
+            <a:pPr algn="l">
+              <a:spcAft>
+                <a:spcPts val="600"/>
+              </a:spcAft>
+            </a:pPr>
+            <a:r>
+              <a:rPr sz="2800" b="1" i="0">
+                <a:solidFill>
+                  <a:srgbClr val="2C5F2D"/>
+                </a:solidFill>
+                <a:latin typeface="Cambria"/>
+              </a:rPr>
               <a:t>Homework — Two Weeks, Four Parts</a:t>
             </a:r>
           </a:p>
@@ -5261,6 +5508,390 @@
 </file>
 
 <file path=ppt/slides/slide12.xml><?xml version="1.0" encoding="utf-8"?>
+<p:sld xmlns:a="http://schemas.openxmlformats.org/drawingml/2006/main" xmlns:p="http://schemas.openxmlformats.org/presentationml/2006/main" xmlns:r="http://schemas.openxmlformats.org/officeDocument/2006/relationships">
+  <p:cSld>
+    <p:spTree>
+      <p:nvGrpSpPr>
+        <p:cNvPr id="1" name=""/>
+        <p:cNvGrpSpPr/>
+        <p:nvPr/>
+      </p:nvGrpSpPr>
+      <p:grpSpPr/>
+      <p:sp>
+        <p:nvSpPr>
+          <p:cNvPr id="2" name="Rectangle 1"/>
+          <p:cNvSpPr/>
+          <p:nvPr/>
+        </p:nvSpPr>
+        <p:spPr>
+          <a:xfrm>
+            <a:off x="0" y="0"/>
+            <a:ext cx="12192000" cy="6858000"/>
+          </a:xfrm>
+          <a:prstGeom prst="rect">
+            <a:avLst/>
+          </a:prstGeom>
+          <a:solidFill>
+            <a:srgbClr val="FFFFFF"/>
+          </a:solidFill>
+          <a:ln>
+            <a:noFill/>
+          </a:ln>
+          <a:effectLst/>
+        </p:spPr>
+        <p:style>
+          <a:lnRef idx="1">
+            <a:schemeClr val="accent1"/>
+          </a:lnRef>
+          <a:fillRef idx="3">
+            <a:schemeClr val="accent1"/>
+          </a:fillRef>
+          <a:effectRef idx="2">
+            <a:schemeClr val="accent1"/>
+          </a:effectRef>
+          <a:fontRef idx="minor">
+            <a:schemeClr val="lt1"/>
+          </a:fontRef>
+        </p:style>
+        <p:txBody>
+          <a:bodyPr rtlCol="0" anchor="ctr"/>
+          <a:lstStyle/>
+          <a:p>
+            <a:pPr algn="ctr"/>
+          </a:p>
+        </p:txBody>
+      </p:sp>
+      <p:sp>
+        <p:nvSpPr>
+          <p:cNvPr id="3" name="TextBox 2"/>
+          <p:cNvSpPr txBox="1"/>
+          <p:nvPr/>
+        </p:nvSpPr>
+        <p:spPr>
+          <a:xfrm>
+            <a:off x="822960" y="502920"/>
+            <a:ext cx="10515600" cy="822960"/>
+          </a:xfrm>
+          <a:prstGeom prst="rect">
+            <a:avLst/>
+          </a:prstGeom>
+          <a:noFill/>
+        </p:spPr>
+        <p:txBody>
+          <a:bodyPr wrap="square">
+            <a:spAutoFit/>
+          </a:bodyPr>
+          <a:lstStyle/>
+          <a:p>
+            <a:r>
+              <a:rPr sz="2800" b="1">
+                <a:solidFill>
+                  <a:srgbClr val="2C5F2D"/>
+                </a:solidFill>
+                <a:latin typeface="Cambria"/>
+              </a:rPr>
+              <a:t>The Take-Home Sheet — the Daily Rhythm</a:t>
+            </a:r>
+          </a:p>
+        </p:txBody>
+      </p:sp>
+      <p:pic>
+        <p:nvPicPr>
+          <p:cNvPr id="4" name="Picture 3" descr="s4_part1.png"/>
+          <p:cNvPicPr>
+            <a:picLocks noChangeAspect="1"/>
+          </p:cNvPicPr>
+          <p:nvPr/>
+        </p:nvPicPr>
+        <p:blipFill>
+          <a:blip r:embed="rId2"/>
+          <a:stretch>
+            <a:fillRect/>
+          </a:stretch>
+        </p:blipFill>
+        <p:spPr>
+          <a:xfrm>
+            <a:off x="1798167" y="1463040"/>
+            <a:ext cx="8595360" cy="4039819"/>
+          </a:xfrm>
+          <a:prstGeom prst="rect">
+            <a:avLst/>
+          </a:prstGeom>
+          <a:ln w="12700">
+            <a:solidFill>
+              <a:srgbClr val="C8C8C8"/>
+            </a:solidFill>
+          </a:ln>
+        </p:spPr>
+      </p:pic>
+      <p:sp>
+        <p:nvSpPr>
+          <p:cNvPr id="5" name="TextBox 4"/>
+          <p:cNvSpPr txBox="1"/>
+          <p:nvPr/>
+        </p:nvSpPr>
+        <p:spPr>
+          <a:xfrm>
+            <a:off x="822960" y="6355080"/>
+            <a:ext cx="10515600" cy="411480"/>
+          </a:xfrm>
+          <a:prstGeom prst="rect">
+            <a:avLst/>
+          </a:prstGeom>
+          <a:noFill/>
+        </p:spPr>
+        <p:txBody>
+          <a:bodyPr wrap="square">
+            <a:spAutoFit/>
+          </a:bodyPr>
+          <a:lstStyle/>
+          <a:p>
+            <a:r>
+              <a:rPr sz="1400" i="1">
+                <a:solidFill>
+                  <a:srgbClr val="595959"/>
+                </a:solidFill>
+                <a:latin typeface="Calibri"/>
+              </a:rPr>
+              <a:t>Handed out now — this is the sheet in your hands.</a:t>
+            </a:r>
+          </a:p>
+        </p:txBody>
+      </p:sp>
+      <p:sp>
+        <p:nvSpPr>
+          <p:cNvPr id="90" name="SlideNum"/>
+          <p:cNvSpPr txBox="1"/>
+          <p:nvPr/>
+        </p:nvSpPr>
+        <p:spPr>
+          <a:xfrm>
+            <a:off x="11384280" y="6446520"/>
+            <a:ext cx="640080" cy="292608"/>
+          </a:xfrm>
+          <a:prstGeom prst="rect">
+            <a:avLst/>
+          </a:prstGeom>
+          <a:noFill/>
+        </p:spPr>
+        <p:txBody>
+          <a:bodyPr wrap="none" lIns="0" tIns="0" rIns="45720" bIns="0" anchor="ctr"/>
+          <a:lstStyle/>
+          <a:p>
+            <a:pPr algn="r"/>
+            <a:r>
+              <a:t>56</a:t>
+            </a:r>
+            <a:endParaRPr sz="1000" b="1">
+              <a:solidFill>
+                <a:srgbClr val="7A8A6E"/>
+              </a:solidFill>
+              <a:latin typeface="Calibri"/>
+            </a:endParaRPr>
+          </a:p>
+        </p:txBody>
+      </p:sp>
+    </p:spTree>
+  </p:cSld>
+  <p:clrMapOvr>
+    <a:masterClrMapping/>
+  </p:clrMapOvr>
+</p:sld>
+</file>
+
+<file path=ppt/slides/slide13.xml><?xml version="1.0" encoding="utf-8"?>
+<p:sld xmlns:a="http://schemas.openxmlformats.org/drawingml/2006/main" xmlns:p="http://schemas.openxmlformats.org/presentationml/2006/main" xmlns:r="http://schemas.openxmlformats.org/officeDocument/2006/relationships">
+  <p:cSld>
+    <p:spTree>
+      <p:nvGrpSpPr>
+        <p:cNvPr id="1" name=""/>
+        <p:cNvGrpSpPr/>
+        <p:nvPr/>
+      </p:nvGrpSpPr>
+      <p:grpSpPr/>
+      <p:sp>
+        <p:nvSpPr>
+          <p:cNvPr id="2" name="Rectangle 1"/>
+          <p:cNvSpPr/>
+          <p:nvPr/>
+        </p:nvSpPr>
+        <p:spPr>
+          <a:xfrm>
+            <a:off x="0" y="0"/>
+            <a:ext cx="12192000" cy="6858000"/>
+          </a:xfrm>
+          <a:prstGeom prst="rect">
+            <a:avLst/>
+          </a:prstGeom>
+          <a:solidFill>
+            <a:srgbClr val="FFFFFF"/>
+          </a:solidFill>
+          <a:ln>
+            <a:noFill/>
+          </a:ln>
+          <a:effectLst/>
+        </p:spPr>
+        <p:style>
+          <a:lnRef idx="1">
+            <a:schemeClr val="accent1"/>
+          </a:lnRef>
+          <a:fillRef idx="3">
+            <a:schemeClr val="accent1"/>
+          </a:fillRef>
+          <a:effectRef idx="2">
+            <a:schemeClr val="accent1"/>
+          </a:effectRef>
+          <a:fontRef idx="minor">
+            <a:schemeClr val="lt1"/>
+          </a:fontRef>
+        </p:style>
+        <p:txBody>
+          <a:bodyPr rtlCol="0" anchor="ctr"/>
+          <a:lstStyle/>
+          <a:p>
+            <a:pPr algn="ctr"/>
+          </a:p>
+        </p:txBody>
+      </p:sp>
+      <p:sp>
+        <p:nvSpPr>
+          <p:cNvPr id="3" name="TextBox 2"/>
+          <p:cNvSpPr txBox="1"/>
+          <p:nvPr/>
+        </p:nvSpPr>
+        <p:spPr>
+          <a:xfrm>
+            <a:off x="822960" y="502920"/>
+            <a:ext cx="10515600" cy="822960"/>
+          </a:xfrm>
+          <a:prstGeom prst="rect">
+            <a:avLst/>
+          </a:prstGeom>
+          <a:noFill/>
+        </p:spPr>
+        <p:txBody>
+          <a:bodyPr wrap="square">
+            <a:spAutoFit/>
+          </a:bodyPr>
+          <a:lstStyle/>
+          <a:p>
+            <a:r>
+              <a:rPr sz="2800" b="1">
+                <a:solidFill>
+                  <a:srgbClr val="2C5F2D"/>
+                </a:solidFill>
+                <a:latin typeface="Cambria"/>
+              </a:rPr>
+              <a:t>The Take-Home Sheet — the Four Parts</a:t>
+            </a:r>
+          </a:p>
+        </p:txBody>
+      </p:sp>
+      <p:pic>
+        <p:nvPicPr>
+          <p:cNvPr id="4" name="Picture 3" descr="s4_part2.png"/>
+          <p:cNvPicPr>
+            <a:picLocks noChangeAspect="1"/>
+          </p:cNvPicPr>
+          <p:nvPr/>
+        </p:nvPicPr>
+        <p:blipFill>
+          <a:blip r:embed="rId2"/>
+          <a:stretch>
+            <a:fillRect/>
+          </a:stretch>
+        </p:blipFill>
+        <p:spPr>
+          <a:xfrm>
+            <a:off x="2066004" y="1463040"/>
+            <a:ext cx="8059687" cy="4709160"/>
+          </a:xfrm>
+          <a:prstGeom prst="rect">
+            <a:avLst/>
+          </a:prstGeom>
+          <a:ln w="12700">
+            <a:solidFill>
+              <a:srgbClr val="C8C8C8"/>
+            </a:solidFill>
+          </a:ln>
+        </p:spPr>
+      </p:pic>
+      <p:sp>
+        <p:nvSpPr>
+          <p:cNvPr id="5" name="TextBox 4"/>
+          <p:cNvSpPr txBox="1"/>
+          <p:nvPr/>
+        </p:nvSpPr>
+        <p:spPr>
+          <a:xfrm>
+            <a:off x="822960" y="6355080"/>
+            <a:ext cx="10515600" cy="411480"/>
+          </a:xfrm>
+          <a:prstGeom prst="rect">
+            <a:avLst/>
+          </a:prstGeom>
+          <a:noFill/>
+        </p:spPr>
+        <p:txBody>
+          <a:bodyPr wrap="square">
+            <a:spAutoFit/>
+          </a:bodyPr>
+          <a:lstStyle/>
+          <a:p>
+            <a:r>
+              <a:rPr sz="1400" i="1">
+                <a:solidFill>
+                  <a:srgbClr val="595959"/>
+                </a:solidFill>
+                <a:latin typeface="Calibri"/>
+              </a:rPr>
+              <a:t>One practice at a time — and a partner expecting you at the end of week one.</a:t>
+            </a:r>
+          </a:p>
+        </p:txBody>
+      </p:sp>
+      <p:sp>
+        <p:nvSpPr>
+          <p:cNvPr id="90" name="SlideNum"/>
+          <p:cNvSpPr txBox="1"/>
+          <p:nvPr/>
+        </p:nvSpPr>
+        <p:spPr>
+          <a:xfrm>
+            <a:off x="11384280" y="6446520"/>
+            <a:ext cx="640080" cy="292608"/>
+          </a:xfrm>
+          <a:prstGeom prst="rect">
+            <a:avLst/>
+          </a:prstGeom>
+          <a:noFill/>
+        </p:spPr>
+        <p:txBody>
+          <a:bodyPr wrap="none" lIns="0" tIns="0" rIns="45720" bIns="0" anchor="ctr"/>
+          <a:lstStyle/>
+          <a:p>
+            <a:pPr algn="r"/>
+            <a:r>
+              <a:t>56a</a:t>
+            </a:r>
+            <a:endParaRPr sz="1000" b="1">
+              <a:solidFill>
+                <a:srgbClr val="7A8A6E"/>
+              </a:solidFill>
+              <a:latin typeface="Calibri"/>
+            </a:endParaRPr>
+          </a:p>
+        </p:txBody>
+      </p:sp>
+    </p:spTree>
+  </p:cSld>
+  <p:clrMapOvr>
+    <a:masterClrMapping/>
+  </p:clrMapOvr>
+</p:sld>
+</file>
+
+<file path=ppt/slides/slide14.xml><?xml version="1.0" encoding="utf-8"?>
 <p:sld xmlns:a="http://schemas.openxmlformats.org/drawingml/2006/main" xmlns:r="http://schemas.openxmlformats.org/officeDocument/2006/relationships" xmlns:p="http://schemas.openxmlformats.org/presentationml/2006/main">
   <p:cSld>
     <p:spTree>
@@ -5593,7 +6224,7 @@
 </p:sld>
 </file>
 
-<file path=ppt/slides/slide13.xml><?xml version="1.0" encoding="utf-8"?>
+<file path=ppt/slides/slide15.xml><?xml version="1.0" encoding="utf-8"?>
 <p:sld xmlns:a="http://schemas.openxmlformats.org/drawingml/2006/main" xmlns:r="http://schemas.openxmlformats.org/officeDocument/2006/relationships" xmlns:p="http://schemas.openxmlformats.org/presentationml/2006/main">
   <p:cSld>
     <p:spTree>
@@ -5984,595 +6615,6 @@
             <a:pPr algn="r"/>
             <a:r>
               <a:t>58</a:t>
-            </a:r>
-            <a:endParaRPr sz="1000" b="1">
-              <a:solidFill>
-                <a:srgbClr val="7A8A6E"/>
-              </a:solidFill>
-              <a:latin typeface="Calibri"/>
-            </a:endParaRPr>
-          </a:p>
-        </p:txBody>
-      </p:sp>
-    </p:spTree>
-  </p:cSld>
-  <p:clrMapOvr>
-    <a:masterClrMapping/>
-  </p:clrMapOvr>
-</p:sld>
-</file>
-
-<file path=ppt/slides/slide14.xml><?xml version="1.0" encoding="utf-8"?>
-<p:sld xmlns:a="http://schemas.openxmlformats.org/drawingml/2006/main" xmlns:p="http://schemas.openxmlformats.org/presentationml/2006/main" xmlns:r="http://schemas.openxmlformats.org/officeDocument/2006/relationships">
-  <p:cSld>
-    <p:spTree>
-      <p:nvGrpSpPr>
-        <p:cNvPr id="1" name=""/>
-        <p:cNvGrpSpPr/>
-        <p:nvPr/>
-      </p:nvGrpSpPr>
-      <p:grpSpPr/>
-      <p:sp>
-        <p:nvSpPr>
-          <p:cNvPr id="2" name="Rectangle 1"/>
-          <p:cNvSpPr/>
-          <p:nvPr/>
-        </p:nvSpPr>
-        <p:spPr>
-          <a:xfrm>
-            <a:off x="0" y="0"/>
-            <a:ext cx="12192000" cy="6858000"/>
-          </a:xfrm>
-          <a:prstGeom prst="rect">
-            <a:avLst/>
-          </a:prstGeom>
-          <a:solidFill>
-            <a:srgbClr val="FFFFFF"/>
-          </a:solidFill>
-          <a:ln>
-            <a:noFill/>
-          </a:ln>
-          <a:effectLst/>
-        </p:spPr>
-        <p:style>
-          <a:lnRef idx="1">
-            <a:schemeClr val="accent1"/>
-          </a:lnRef>
-          <a:fillRef idx="3">
-            <a:schemeClr val="accent1"/>
-          </a:fillRef>
-          <a:effectRef idx="2">
-            <a:schemeClr val="accent1"/>
-          </a:effectRef>
-          <a:fontRef idx="minor">
-            <a:schemeClr val="lt1"/>
-          </a:fontRef>
-        </p:style>
-        <p:txBody>
-          <a:bodyPr rtlCol="0" anchor="ctr"/>
-          <a:lstStyle/>
-          <a:p>
-            <a:pPr algn="ctr"/>
-          </a:p>
-        </p:txBody>
-      </p:sp>
-      <p:sp>
-        <p:nvSpPr>
-          <p:cNvPr id="3" name="TextBox 2"/>
-          <p:cNvSpPr txBox="1"/>
-          <p:nvPr/>
-        </p:nvSpPr>
-        <p:spPr>
-          <a:xfrm>
-            <a:off x="822960" y="502920"/>
-            <a:ext cx="10515600" cy="822960"/>
-          </a:xfrm>
-          <a:prstGeom prst="rect">
-            <a:avLst/>
-          </a:prstGeom>
-          <a:noFill/>
-        </p:spPr>
-        <p:txBody>
-          <a:bodyPr wrap="square">
-            <a:spAutoFit/>
-          </a:bodyPr>
-          <a:lstStyle/>
-          <a:p>
-            <a:r>
-              <a:rPr sz="2800" b="1">
-                <a:solidFill>
-                  <a:srgbClr val="2C5F2D"/>
-                </a:solidFill>
-                <a:latin typeface="Cambria"/>
-              </a:rPr>
-              <a:t>Where We Are — the Four Connects</a:t>
-            </a:r>
-          </a:p>
-        </p:txBody>
-      </p:sp>
-      <p:pic>
-        <p:nvPicPr>
-          <p:cNvPr id="4" name="Picture 3" descr="four-connects.png"/>
-          <p:cNvPicPr>
-            <a:picLocks noChangeAspect="1"/>
-          </p:cNvPicPr>
-          <p:nvPr/>
-        </p:nvPicPr>
-        <p:blipFill>
-          <a:blip r:embed="rId2"/>
-          <a:stretch>
-            <a:fillRect/>
-          </a:stretch>
-        </p:blipFill>
-        <p:spPr>
-          <a:xfrm>
-            <a:off x="932688" y="1645920"/>
-            <a:ext cx="10332720" cy="3708663"/>
-          </a:xfrm>
-          <a:prstGeom prst="rect">
-            <a:avLst/>
-          </a:prstGeom>
-        </p:spPr>
-      </p:pic>
-      <p:sp>
-        <p:nvSpPr>
-          <p:cNvPr id="5" name="TextBox 4"/>
-          <p:cNvSpPr txBox="1"/>
-          <p:nvPr/>
-        </p:nvSpPr>
-        <p:spPr>
-          <a:xfrm>
-            <a:off x="822960" y="5623560"/>
-            <a:ext cx="10515600" cy="914400"/>
-          </a:xfrm>
-          <a:prstGeom prst="rect">
-            <a:avLst/>
-          </a:prstGeom>
-          <a:noFill/>
-        </p:spPr>
-        <p:txBody>
-          <a:bodyPr wrap="square">
-            <a:spAutoFit/>
-          </a:bodyPr>
-          <a:lstStyle/>
-          <a:p>
-            <a:r>
-              <a:rPr sz="1800" b="0">
-                <a:solidFill>
-                  <a:srgbClr val="222B22"/>
-                </a:solidFill>
-                <a:latin typeface="Calibri"/>
-              </a:rPr>
-              <a:t>Session 4 crosses from the first box toward the second — </a:t>
-            </a:r>
-            <a:r>
-              <a:rPr sz="1800" b="1">
-                <a:solidFill>
-                  <a:srgbClr val="2C5F2D"/>
-                </a:solidFill>
-                <a:latin typeface="Calibri"/>
-              </a:rPr>
-              <a:t>Self opening toward Others</a:t>
-            </a:r>
-            <a:r>
-              <a:rPr sz="1800" b="0">
-                <a:solidFill>
-                  <a:srgbClr val="222B22"/>
-                </a:solidFill>
-                <a:latin typeface="Calibri"/>
-              </a:rPr>
-              <a:t> — walked again, teen-led. Each connection makes the next one real (Matt. 22:37–40).</a:t>
-            </a:r>
-          </a:p>
-        </p:txBody>
-      </p:sp>
-      <p:sp>
-        <p:nvSpPr>
-          <p:cNvPr id="90" name="SlideNum"/>
-          <p:cNvSpPr txBox="1"/>
-          <p:nvPr/>
-        </p:nvSpPr>
-        <p:spPr>
-          <a:xfrm>
-            <a:off x="11384280" y="6446520"/>
-            <a:ext cx="640080" cy="292608"/>
-          </a:xfrm>
-          <a:prstGeom prst="rect">
-            <a:avLst/>
-          </a:prstGeom>
-          <a:noFill/>
-        </p:spPr>
-        <p:txBody>
-          <a:bodyPr wrap="none" lIns="0" tIns="0" rIns="45720" bIns="0" anchor="ctr"/>
-          <a:lstStyle/>
-          <a:p>
-            <a:pPr algn="r"/>
-            <a:r>
-              <a:t>47a</a:t>
-            </a:r>
-            <a:endParaRPr sz="1000" b="1">
-              <a:solidFill>
-                <a:srgbClr val="7A8A6E"/>
-              </a:solidFill>
-              <a:latin typeface="Calibri"/>
-            </a:endParaRPr>
-          </a:p>
-        </p:txBody>
-      </p:sp>
-    </p:spTree>
-  </p:cSld>
-  <p:clrMapOvr>
-    <a:masterClrMapping/>
-  </p:clrMapOvr>
-</p:sld>
-</file>
-
-<file path=ppt/slides/slide15.xml><?xml version="1.0" encoding="utf-8"?>
-<p:sld xmlns:a="http://schemas.openxmlformats.org/drawingml/2006/main" xmlns:p="http://schemas.openxmlformats.org/presentationml/2006/main" xmlns:r="http://schemas.openxmlformats.org/officeDocument/2006/relationships">
-  <p:cSld>
-    <p:spTree>
-      <p:nvGrpSpPr>
-        <p:cNvPr id="1" name=""/>
-        <p:cNvGrpSpPr/>
-        <p:nvPr/>
-      </p:nvGrpSpPr>
-      <p:grpSpPr/>
-      <p:sp>
-        <p:nvSpPr>
-          <p:cNvPr id="2" name="Rectangle 1"/>
-          <p:cNvSpPr/>
-          <p:nvPr/>
-        </p:nvSpPr>
-        <p:spPr>
-          <a:xfrm>
-            <a:off x="0" y="0"/>
-            <a:ext cx="12192000" cy="6858000"/>
-          </a:xfrm>
-          <a:prstGeom prst="rect">
-            <a:avLst/>
-          </a:prstGeom>
-          <a:solidFill>
-            <a:srgbClr val="FFFFFF"/>
-          </a:solidFill>
-          <a:ln>
-            <a:noFill/>
-          </a:ln>
-          <a:effectLst/>
-        </p:spPr>
-        <p:style>
-          <a:lnRef idx="1">
-            <a:schemeClr val="accent1"/>
-          </a:lnRef>
-          <a:fillRef idx="3">
-            <a:schemeClr val="accent1"/>
-          </a:fillRef>
-          <a:effectRef idx="2">
-            <a:schemeClr val="accent1"/>
-          </a:effectRef>
-          <a:fontRef idx="minor">
-            <a:schemeClr val="lt1"/>
-          </a:fontRef>
-        </p:style>
-        <p:txBody>
-          <a:bodyPr rtlCol="0" anchor="ctr"/>
-          <a:lstStyle/>
-          <a:p>
-            <a:pPr algn="ctr"/>
-          </a:p>
-        </p:txBody>
-      </p:sp>
-      <p:sp>
-        <p:nvSpPr>
-          <p:cNvPr id="3" name="TextBox 2"/>
-          <p:cNvSpPr txBox="1"/>
-          <p:nvPr/>
-        </p:nvSpPr>
-        <p:spPr>
-          <a:xfrm>
-            <a:off x="822960" y="502920"/>
-            <a:ext cx="10515600" cy="822960"/>
-          </a:xfrm>
-          <a:prstGeom prst="rect">
-            <a:avLst/>
-          </a:prstGeom>
-          <a:noFill/>
-        </p:spPr>
-        <p:txBody>
-          <a:bodyPr wrap="square">
-            <a:spAutoFit/>
-          </a:bodyPr>
-          <a:lstStyle/>
-          <a:p>
-            <a:r>
-              <a:rPr sz="2800" b="1">
-                <a:solidFill>
-                  <a:srgbClr val="2C5F2D"/>
-                </a:solidFill>
-                <a:latin typeface="Cambria"/>
-              </a:rPr>
-              <a:t>The Take-Home Sheet — the Daily Rhythm</a:t>
-            </a:r>
-          </a:p>
-        </p:txBody>
-      </p:sp>
-      <p:pic>
-        <p:nvPicPr>
-          <p:cNvPr id="4" name="Picture 3" descr="s4_part1.png"/>
-          <p:cNvPicPr>
-            <a:picLocks noChangeAspect="1"/>
-          </p:cNvPicPr>
-          <p:nvPr/>
-        </p:nvPicPr>
-        <p:blipFill>
-          <a:blip r:embed="rId2"/>
-          <a:stretch>
-            <a:fillRect/>
-          </a:stretch>
-        </p:blipFill>
-        <p:spPr>
-          <a:xfrm>
-            <a:off x="1798167" y="1463040"/>
-            <a:ext cx="8595360" cy="4039819"/>
-          </a:xfrm>
-          <a:prstGeom prst="rect">
-            <a:avLst/>
-          </a:prstGeom>
-          <a:ln w="12700">
-            <a:solidFill>
-              <a:srgbClr val="C8C8C8"/>
-            </a:solidFill>
-          </a:ln>
-        </p:spPr>
-      </p:pic>
-      <p:sp>
-        <p:nvSpPr>
-          <p:cNvPr id="5" name="TextBox 4"/>
-          <p:cNvSpPr txBox="1"/>
-          <p:nvPr/>
-        </p:nvSpPr>
-        <p:spPr>
-          <a:xfrm>
-            <a:off x="822960" y="6355080"/>
-            <a:ext cx="10515600" cy="411480"/>
-          </a:xfrm>
-          <a:prstGeom prst="rect">
-            <a:avLst/>
-          </a:prstGeom>
-          <a:noFill/>
-        </p:spPr>
-        <p:txBody>
-          <a:bodyPr wrap="square">
-            <a:spAutoFit/>
-          </a:bodyPr>
-          <a:lstStyle/>
-          <a:p>
-            <a:r>
-              <a:rPr sz="1400" i="1">
-                <a:solidFill>
-                  <a:srgbClr val="595959"/>
-                </a:solidFill>
-                <a:latin typeface="Calibri"/>
-              </a:rPr>
-              <a:t>Handed out now — this is the sheet in your hands.</a:t>
-            </a:r>
-          </a:p>
-        </p:txBody>
-      </p:sp>
-      <p:sp>
-        <p:nvSpPr>
-          <p:cNvPr id="90" name="SlideNum"/>
-          <p:cNvSpPr txBox="1"/>
-          <p:nvPr/>
-        </p:nvSpPr>
-        <p:spPr>
-          <a:xfrm>
-            <a:off x="11384280" y="6446520"/>
-            <a:ext cx="640080" cy="292608"/>
-          </a:xfrm>
-          <a:prstGeom prst="rect">
-            <a:avLst/>
-          </a:prstGeom>
-          <a:noFill/>
-        </p:spPr>
-        <p:txBody>
-          <a:bodyPr wrap="none" lIns="0" tIns="0" rIns="45720" bIns="0" anchor="ctr"/>
-          <a:lstStyle/>
-          <a:p>
-            <a:pPr algn="r"/>
-            <a:r>
-              <a:t>56</a:t>
-            </a:r>
-            <a:endParaRPr sz="1000" b="1">
-              <a:solidFill>
-                <a:srgbClr val="7A8A6E"/>
-              </a:solidFill>
-              <a:latin typeface="Calibri"/>
-            </a:endParaRPr>
-          </a:p>
-        </p:txBody>
-      </p:sp>
-    </p:spTree>
-  </p:cSld>
-  <p:clrMapOvr>
-    <a:masterClrMapping/>
-  </p:clrMapOvr>
-</p:sld>
-</file>
-
-<file path=ppt/slides/slide16.xml><?xml version="1.0" encoding="utf-8"?>
-<p:sld xmlns:a="http://schemas.openxmlformats.org/drawingml/2006/main" xmlns:p="http://schemas.openxmlformats.org/presentationml/2006/main" xmlns:r="http://schemas.openxmlformats.org/officeDocument/2006/relationships">
-  <p:cSld>
-    <p:spTree>
-      <p:nvGrpSpPr>
-        <p:cNvPr id="1" name=""/>
-        <p:cNvGrpSpPr/>
-        <p:nvPr/>
-      </p:nvGrpSpPr>
-      <p:grpSpPr/>
-      <p:sp>
-        <p:nvSpPr>
-          <p:cNvPr id="2" name="Rectangle 1"/>
-          <p:cNvSpPr/>
-          <p:nvPr/>
-        </p:nvSpPr>
-        <p:spPr>
-          <a:xfrm>
-            <a:off x="0" y="0"/>
-            <a:ext cx="12192000" cy="6858000"/>
-          </a:xfrm>
-          <a:prstGeom prst="rect">
-            <a:avLst/>
-          </a:prstGeom>
-          <a:solidFill>
-            <a:srgbClr val="FFFFFF"/>
-          </a:solidFill>
-          <a:ln>
-            <a:noFill/>
-          </a:ln>
-          <a:effectLst/>
-        </p:spPr>
-        <p:style>
-          <a:lnRef idx="1">
-            <a:schemeClr val="accent1"/>
-          </a:lnRef>
-          <a:fillRef idx="3">
-            <a:schemeClr val="accent1"/>
-          </a:fillRef>
-          <a:effectRef idx="2">
-            <a:schemeClr val="accent1"/>
-          </a:effectRef>
-          <a:fontRef idx="minor">
-            <a:schemeClr val="lt1"/>
-          </a:fontRef>
-        </p:style>
-        <p:txBody>
-          <a:bodyPr rtlCol="0" anchor="ctr"/>
-          <a:lstStyle/>
-          <a:p>
-            <a:pPr algn="ctr"/>
-          </a:p>
-        </p:txBody>
-      </p:sp>
-      <p:sp>
-        <p:nvSpPr>
-          <p:cNvPr id="3" name="TextBox 2"/>
-          <p:cNvSpPr txBox="1"/>
-          <p:nvPr/>
-        </p:nvSpPr>
-        <p:spPr>
-          <a:xfrm>
-            <a:off x="822960" y="502920"/>
-            <a:ext cx="10515600" cy="822960"/>
-          </a:xfrm>
-          <a:prstGeom prst="rect">
-            <a:avLst/>
-          </a:prstGeom>
-          <a:noFill/>
-        </p:spPr>
-        <p:txBody>
-          <a:bodyPr wrap="square">
-            <a:spAutoFit/>
-          </a:bodyPr>
-          <a:lstStyle/>
-          <a:p>
-            <a:r>
-              <a:rPr sz="2800" b="1">
-                <a:solidFill>
-                  <a:srgbClr val="2C5F2D"/>
-                </a:solidFill>
-                <a:latin typeface="Cambria"/>
-              </a:rPr>
-              <a:t>The Take-Home Sheet — the Four Parts</a:t>
-            </a:r>
-          </a:p>
-        </p:txBody>
-      </p:sp>
-      <p:pic>
-        <p:nvPicPr>
-          <p:cNvPr id="4" name="Picture 3" descr="s4_part2.png"/>
-          <p:cNvPicPr>
-            <a:picLocks noChangeAspect="1"/>
-          </p:cNvPicPr>
-          <p:nvPr/>
-        </p:nvPicPr>
-        <p:blipFill>
-          <a:blip r:embed="rId2"/>
-          <a:stretch>
-            <a:fillRect/>
-          </a:stretch>
-        </p:blipFill>
-        <p:spPr>
-          <a:xfrm>
-            <a:off x="2066004" y="1463040"/>
-            <a:ext cx="8059687" cy="4709160"/>
-          </a:xfrm>
-          <a:prstGeom prst="rect">
-            <a:avLst/>
-          </a:prstGeom>
-          <a:ln w="12700">
-            <a:solidFill>
-              <a:srgbClr val="C8C8C8"/>
-            </a:solidFill>
-          </a:ln>
-        </p:spPr>
-      </p:pic>
-      <p:sp>
-        <p:nvSpPr>
-          <p:cNvPr id="5" name="TextBox 4"/>
-          <p:cNvSpPr txBox="1"/>
-          <p:nvPr/>
-        </p:nvSpPr>
-        <p:spPr>
-          <a:xfrm>
-            <a:off x="822960" y="6355080"/>
-            <a:ext cx="10515600" cy="411480"/>
-          </a:xfrm>
-          <a:prstGeom prst="rect">
-            <a:avLst/>
-          </a:prstGeom>
-          <a:noFill/>
-        </p:spPr>
-        <p:txBody>
-          <a:bodyPr wrap="square">
-            <a:spAutoFit/>
-          </a:bodyPr>
-          <a:lstStyle/>
-          <a:p>
-            <a:r>
-              <a:rPr sz="1400" i="1">
-                <a:solidFill>
-                  <a:srgbClr val="595959"/>
-                </a:solidFill>
-                <a:latin typeface="Calibri"/>
-              </a:rPr>
-              <a:t>One practice at a time — and a partner expecting you at the end of week one.</a:t>
-            </a:r>
-          </a:p>
-        </p:txBody>
-      </p:sp>
-      <p:sp>
-        <p:nvSpPr>
-          <p:cNvPr id="90" name="SlideNum"/>
-          <p:cNvSpPr txBox="1"/>
-          <p:nvPr/>
-        </p:nvSpPr>
-        <p:spPr>
-          <a:xfrm>
-            <a:off x="11384280" y="6446520"/>
-            <a:ext cx="640080" cy="292608"/>
-          </a:xfrm>
-          <a:prstGeom prst="rect">
-            <a:avLst/>
-          </a:prstGeom>
-          <a:noFill/>
-        </p:spPr>
-        <p:txBody>
-          <a:bodyPr wrap="none" lIns="0" tIns="0" rIns="45720" bIns="0" anchor="ctr"/>
-          <a:lstStyle/>
-          <a:p>
-            <a:pPr algn="r"/>
-            <a:r>
-              <a:t>56a</a:t>
             </a:r>
             <a:endParaRPr sz="1000" b="1">
               <a:solidFill>
@@ -6841,6 +6883,211 @@
 </file>
 
 <file path=ppt/slides/slide3.xml><?xml version="1.0" encoding="utf-8"?>
+<p:sld xmlns:a="http://schemas.openxmlformats.org/drawingml/2006/main" xmlns:p="http://schemas.openxmlformats.org/presentationml/2006/main" xmlns:r="http://schemas.openxmlformats.org/officeDocument/2006/relationships">
+  <p:cSld>
+    <p:spTree>
+      <p:nvGrpSpPr>
+        <p:cNvPr id="1" name=""/>
+        <p:cNvGrpSpPr/>
+        <p:nvPr/>
+      </p:nvGrpSpPr>
+      <p:grpSpPr/>
+      <p:sp>
+        <p:nvSpPr>
+          <p:cNvPr id="2" name="Rectangle 1"/>
+          <p:cNvSpPr/>
+          <p:nvPr/>
+        </p:nvSpPr>
+        <p:spPr>
+          <a:xfrm>
+            <a:off x="0" y="0"/>
+            <a:ext cx="12192000" cy="6858000"/>
+          </a:xfrm>
+          <a:prstGeom prst="rect">
+            <a:avLst/>
+          </a:prstGeom>
+          <a:solidFill>
+            <a:srgbClr val="FFFFFF"/>
+          </a:solidFill>
+          <a:ln>
+            <a:noFill/>
+          </a:ln>
+          <a:effectLst/>
+        </p:spPr>
+        <p:style>
+          <a:lnRef idx="1">
+            <a:schemeClr val="accent1"/>
+          </a:lnRef>
+          <a:fillRef idx="3">
+            <a:schemeClr val="accent1"/>
+          </a:fillRef>
+          <a:effectRef idx="2">
+            <a:schemeClr val="accent1"/>
+          </a:effectRef>
+          <a:fontRef idx="minor">
+            <a:schemeClr val="lt1"/>
+          </a:fontRef>
+        </p:style>
+        <p:txBody>
+          <a:bodyPr rtlCol="0" anchor="ctr"/>
+          <a:lstStyle/>
+          <a:p>
+            <a:pPr algn="ctr"/>
+          </a:p>
+        </p:txBody>
+      </p:sp>
+      <p:sp>
+        <p:nvSpPr>
+          <p:cNvPr id="3" name="TextBox 2"/>
+          <p:cNvSpPr txBox="1"/>
+          <p:nvPr/>
+        </p:nvSpPr>
+        <p:spPr>
+          <a:xfrm>
+            <a:off x="822960" y="502920"/>
+            <a:ext cx="10515600" cy="822960"/>
+          </a:xfrm>
+          <a:prstGeom prst="rect">
+            <a:avLst/>
+          </a:prstGeom>
+          <a:noFill/>
+        </p:spPr>
+        <p:txBody>
+          <a:bodyPr wrap="square">
+            <a:spAutoFit/>
+          </a:bodyPr>
+          <a:lstStyle/>
+          <a:p>
+            <a:r>
+              <a:rPr sz="2800" b="1">
+                <a:solidFill>
+                  <a:srgbClr val="2C5F2D"/>
+                </a:solidFill>
+                <a:latin typeface="Cambria"/>
+              </a:rPr>
+              <a:t>Where We Are — the Four Connects</a:t>
+            </a:r>
+          </a:p>
+        </p:txBody>
+      </p:sp>
+      <p:sp>
+        <p:nvSpPr>
+          <p:cNvPr id="5" name="TextBox 4"/>
+          <p:cNvSpPr txBox="1"/>
+          <p:nvPr/>
+        </p:nvSpPr>
+        <p:spPr>
+          <a:xfrm>
+            <a:off x="822960" y="5623560"/>
+            <a:ext cx="10515600" cy="914400"/>
+          </a:xfrm>
+          <a:prstGeom prst="rect">
+            <a:avLst/>
+          </a:prstGeom>
+          <a:noFill/>
+        </p:spPr>
+        <p:txBody>
+          <a:bodyPr wrap="square">
+            <a:spAutoFit/>
+          </a:bodyPr>
+          <a:lstStyle/>
+          <a:p>
+            <a:r>
+              <a:rPr sz="1800" b="0">
+                <a:solidFill>
+                  <a:srgbClr val="222B22"/>
+                </a:solidFill>
+                <a:latin typeface="Calibri"/>
+              </a:rPr>
+              <a:t>Session 4 crosses from the first box toward the second — </a:t>
+            </a:r>
+            <a:r>
+              <a:rPr sz="1800" b="1">
+                <a:solidFill>
+                  <a:srgbClr val="2C5F2D"/>
+                </a:solidFill>
+                <a:latin typeface="Calibri"/>
+              </a:rPr>
+              <a:t>Self opening toward Others</a:t>
+            </a:r>
+            <a:r>
+              <a:rPr sz="1800" b="0">
+                <a:solidFill>
+                  <a:srgbClr val="222B22"/>
+                </a:solidFill>
+                <a:latin typeface="Calibri"/>
+              </a:rPr>
+              <a:t> — walked again, teen-led. Each connection makes the next one real (Matt. 22:37–40).</a:t>
+            </a:r>
+          </a:p>
+        </p:txBody>
+      </p:sp>
+      <p:sp>
+        <p:nvSpPr>
+          <p:cNvPr id="90" name="SlideNum"/>
+          <p:cNvSpPr txBox="1"/>
+          <p:nvPr/>
+        </p:nvSpPr>
+        <p:spPr>
+          <a:xfrm>
+            <a:off x="11384280" y="6446520"/>
+            <a:ext cx="640080" cy="292608"/>
+          </a:xfrm>
+          <a:prstGeom prst="rect">
+            <a:avLst/>
+          </a:prstGeom>
+          <a:noFill/>
+        </p:spPr>
+        <p:txBody>
+          <a:bodyPr wrap="none" lIns="0" tIns="0" rIns="45720" bIns="0" anchor="ctr"/>
+          <a:lstStyle/>
+          <a:p>
+            <a:pPr algn="r"/>
+            <a:r>
+              <a:t>47a</a:t>
+            </a:r>
+            <a:endParaRPr sz="1000" b="1">
+              <a:solidFill>
+                <a:srgbClr val="7A8A6E"/>
+              </a:solidFill>
+              <a:latin typeface="Calibri"/>
+            </a:endParaRPr>
+          </a:p>
+        </p:txBody>
+      </p:sp>
+      <p:pic>
+        <p:nvPicPr>
+          <p:cNvPr id="91" name="Picture 90" descr="four-connects.png"/>
+          <p:cNvPicPr>
+            <a:picLocks noChangeAspect="1"/>
+          </p:cNvPicPr>
+          <p:nvPr/>
+        </p:nvPicPr>
+        <p:blipFill>
+          <a:blip r:embed="rId4"/>
+          <a:stretch>
+            <a:fillRect/>
+          </a:stretch>
+        </p:blipFill>
+        <p:spPr>
+          <a:xfrm>
+            <a:off x="932688" y="1645920"/>
+            <a:ext cx="10332720" cy="3708663"/>
+          </a:xfrm>
+          <a:prstGeom prst="rect">
+            <a:avLst/>
+          </a:prstGeom>
+        </p:spPr>
+      </p:pic>
+    </p:spTree>
+  </p:cSld>
+  <p:clrMapOvr>
+    <a:masterClrMapping/>
+  </p:clrMapOvr>
+</p:sld>
+</file>
+
+<file path=ppt/slides/slide4.xml><?xml version="1.0" encoding="utf-8"?>
 <p:sld xmlns:a="http://schemas.openxmlformats.org/drawingml/2006/main" xmlns:r="http://schemas.openxmlformats.org/officeDocument/2006/relationships" xmlns:p="http://schemas.openxmlformats.org/presentationml/2006/main">
   <p:cSld>
     <p:spTree>
@@ -7266,7 +7513,7 @@
 </p:sld>
 </file>
 
-<file path=ppt/slides/slide4.xml><?xml version="1.0" encoding="utf-8"?>
+<file path=ppt/slides/slide5.xml><?xml version="1.0" encoding="utf-8"?>
 <p:sld xmlns:a="http://schemas.openxmlformats.org/drawingml/2006/main" xmlns:r="http://schemas.openxmlformats.org/officeDocument/2006/relationships" xmlns:p="http://schemas.openxmlformats.org/presentationml/2006/main">
   <p:cSld>
     <p:spTree>
@@ -7613,7 +7860,7 @@
 </p:sld>
 </file>
 
-<file path=ppt/slides/slide5.xml><?xml version="1.0" encoding="utf-8"?>
+<file path=ppt/slides/slide6.xml><?xml version="1.0" encoding="utf-8"?>
 <p:sld xmlns:a="http://schemas.openxmlformats.org/drawingml/2006/main" xmlns:r="http://schemas.openxmlformats.org/officeDocument/2006/relationships" xmlns:p="http://schemas.openxmlformats.org/presentationml/2006/main">
   <p:cSld>
     <p:spTree>
@@ -7896,308 +8143,6 @@
 </p:sld>
 </file>
 
-<file path=ppt/slides/slide6.xml><?xml version="1.0" encoding="utf-8"?>
-<p:sld xmlns:a="http://schemas.openxmlformats.org/drawingml/2006/main" xmlns:r="http://schemas.openxmlformats.org/officeDocument/2006/relationships" xmlns:p="http://schemas.openxmlformats.org/presentationml/2006/main">
-  <p:cSld>
-    <p:spTree>
-      <p:nvGrpSpPr>
-        <p:cNvPr id="1" name=""/>
-        <p:cNvGrpSpPr/>
-        <p:nvPr/>
-      </p:nvGrpSpPr>
-      <p:grpSpPr>
-        <a:xfrm>
-          <a:off x="0" y="0"/>
-          <a:ext cx="0" cy="0"/>
-          <a:chOff x="0" y="0"/>
-          <a:chExt cx="0" cy="0"/>
-        </a:xfrm>
-      </p:grpSpPr>
-      <p:sp>
-        <p:nvSpPr>
-          <p:cNvPr id="2" name="Rectangle 1"/>
-          <p:cNvSpPr/>
-          <p:nvPr/>
-        </p:nvSpPr>
-        <p:spPr>
-          <a:xfrm>
-            <a:off x="0" y="0"/>
-            <a:ext cx="12191695" cy="6858000"/>
-          </a:xfrm>
-          <a:prstGeom prst="rect">
-            <a:avLst/>
-          </a:prstGeom>
-          <a:solidFill>
-            <a:srgbClr val="FFFFFF"/>
-          </a:solidFill>
-          <a:ln>
-            <a:noFill/>
-          </a:ln>
-        </p:spPr>
-        <p:txBody>
-          <a:bodyPr/>
-          <a:lstStyle/>
-          <a:p>
-            <a:endParaRPr/>
-          </a:p>
-        </p:txBody>
-      </p:sp>
-      <p:sp>
-        <p:nvSpPr>
-          <p:cNvPr id="3" name="TextBox 2"/>
-          <p:cNvSpPr txBox="1"/>
-          <p:nvPr/>
-        </p:nvSpPr>
-        <p:spPr>
-          <a:xfrm>
-            <a:off x="822960" y="502920"/>
-            <a:ext cx="10515600" cy="822960"/>
-          </a:xfrm>
-          <a:prstGeom prst="rect">
-            <a:avLst/>
-          </a:prstGeom>
-          <a:noFill/>
-        </p:spPr>
-        <p:txBody>
-          <a:bodyPr wrap="square">
-            <a:spAutoFit/>
-          </a:bodyPr>
-          <a:lstStyle/>
-          <a:p>
-            <a:pPr algn="l">
-              <a:spcAft>
-                <a:spcPts val="600"/>
-              </a:spcAft>
-            </a:pPr>
-            <a:r>
-              <a:rPr sz="2800" b="1" i="0">
-                <a:solidFill>
-                  <a:srgbClr val="2C5F2D"/>
-                </a:solidFill>
-                <a:latin typeface="Cambria"/>
-              </a:rPr>
-              <a:t>Psalm 139 — Being Known, Again</a:t>
-            </a:r>
-          </a:p>
-        </p:txBody>
-      </p:sp>
-      <p:sp>
-        <p:nvSpPr>
-          <p:cNvPr id="4" name="TextBox 4"/>
-          <p:cNvSpPr txBox="1"/>
-          <p:nvPr/>
-        </p:nvSpPr>
-        <p:spPr>
-          <a:xfrm>
-            <a:off x="822960" y="1600200"/>
-            <a:ext cx="5669280" cy="4572000"/>
-          </a:xfrm>
-          <a:prstGeom prst="rect">
-            <a:avLst/>
-          </a:prstGeom>
-          <a:noFill/>
-        </p:spPr>
-        <p:txBody>
-          <a:bodyPr wrap="square" lIns="91440" tIns="91440" rIns="91440" bIns="91440"/>
-          <a:lstStyle/>
-          <a:p>
-            <a:pPr marL="274320" indent="-274320">
-              <a:spcAft>
-                <a:spcPts val="800"/>
-              </a:spcAft>
-            </a:pPr>
-            <a:r>
-              <a:rPr sz="2200" b="1" i="0">
-                <a:solidFill>
-                  <a:srgbClr val="97BC62"/>
-                </a:solidFill>
-                <a:latin typeface="Calibri"/>
-              </a:rPr>
-              <a:t>•  </a:t>
-            </a:r>
-            <a:r>
-              <a:rPr sz="2200" b="0" i="0">
-                <a:solidFill>
-                  <a:srgbClr val="222B22"/>
-                </a:solidFill>
-                <a:latin typeface="Calibri"/>
-              </a:rPr>
-              <a:t>Same psalm as last week, on purpose — nothing new tonight; we’re completing the round</a:t>
-            </a:r>
-          </a:p>
-          <a:p>
-            <a:pPr marL="274320" indent="-274320">
-              <a:spcAft>
-                <a:spcPts val="800"/>
-              </a:spcAft>
-            </a:pPr>
-            <a:r>
-              <a:rPr sz="2200" b="1" i="0">
-                <a:solidFill>
-                  <a:srgbClr val="97BC62"/>
-                </a:solidFill>
-                <a:latin typeface="Calibri"/>
-              </a:rPr>
-              <a:t>•  </a:t>
-            </a:r>
-            <a:r>
-              <a:rPr sz="2200" b="0" i="0">
-                <a:solidFill>
-                  <a:srgbClr val="222B22"/>
-                </a:solidFill>
-                <a:latin typeface="Calibri"/>
-              </a:rPr>
-              <a:t>One idea, repeated: the opposite of being hidden is not being exposed — it is being seen and being safe at the same time</a:t>
-            </a:r>
-          </a:p>
-          <a:p>
-            <a:pPr marL="274320" indent="-274320">
-              <a:spcAft>
-                <a:spcPts val="800"/>
-              </a:spcAft>
-            </a:pPr>
-            <a:r>
-              <a:rPr sz="2200" b="1" i="0">
-                <a:solidFill>
-                  <a:srgbClr val="97BC62"/>
-                </a:solidFill>
-                <a:latin typeface="Calibri"/>
-              </a:rPr>
-              <a:t>•  </a:t>
-            </a:r>
-            <a:r>
-              <a:rPr sz="2200" b="0" i="0">
-                <a:solidFill>
-                  <a:srgbClr val="222B22"/>
-                </a:solidFill>
-                <a:latin typeface="Calibri"/>
-              </a:rPr>
-              <a:t>The parents practiced that last Wednesday. Tonight the teens do</a:t>
-            </a:r>
-          </a:p>
-          <a:p>
-            <a:pPr marL="274320" indent="-274320">
-              <a:spcAft>
-                <a:spcPts val="800"/>
-              </a:spcAft>
-            </a:pPr>
-            <a:r>
-              <a:rPr sz="2200" b="1" i="0">
-                <a:solidFill>
-                  <a:srgbClr val="97BC62"/>
-                </a:solidFill>
-                <a:latin typeface="Calibri"/>
-              </a:rPr>
-              <a:t>•  </a:t>
-            </a:r>
-            <a:r>
-              <a:rPr sz="2200" b="0" i="0">
-                <a:solidFill>
-                  <a:srgbClr val="222B22"/>
-                </a:solidFill>
-                <a:latin typeface="Calibri"/>
-              </a:rPr>
-              <a:t>Put the comparison down — “Every story is its own. … The story you tell tonight is not in competition with any story told in this building last week. Tell yours.”</a:t>
-            </a:r>
-          </a:p>
-        </p:txBody>
-      </p:sp>
-      <p:sp>
-        <p:nvSpPr>
-          <p:cNvPr id="6" name="TextBox 6"/>
-          <p:cNvSpPr txBox="1"/>
-          <p:nvPr/>
-        </p:nvSpPr>
-        <p:spPr>
-          <a:xfrm>
-            <a:off x="6766560" y="1737360"/>
-            <a:ext cx="4663440" cy="2542032"/>
-          </a:xfrm>
-          <a:prstGeom prst="rect">
-            <a:avLst/>
-          </a:prstGeom>
-          <a:solidFill>
-            <a:srgbClr val="F1F6EC"/>
-          </a:solidFill>
-        </p:spPr>
-        <p:txBody>
-          <a:bodyPr wrap="square" lIns="91440" tIns="91440" rIns="91440" bIns="91440" anchor="ctr"/>
-          <a:lstStyle/>
-          <a:p>
-            <a:pPr>
-              <a:spcAft>
-                <a:spcPts val="900"/>
-              </a:spcAft>
-            </a:pPr>
-            <a:r>
-              <a:rPr sz="1200" b="1" i="0">
-                <a:solidFill>
-                  <a:srgbClr val="97BC62"/>
-                </a:solidFill>
-                <a:latin typeface="Calibri"/>
-              </a:rPr>
-              <a:t>PSALM 139:23–24</a:t>
-            </a:r>
-          </a:p>
-          <a:p>
-            <a:pPr>
-              <a:spcAft>
-                <a:spcPts val="600"/>
-              </a:spcAft>
-            </a:pPr>
-            <a:r>
-              <a:rPr sz="2400" b="0" i="1">
-                <a:solidFill>
-                  <a:srgbClr val="222B22"/>
-                </a:solidFill>
-                <a:latin typeface="Cambria"/>
-              </a:rPr>
-              <a:t>“Search me, O God, and know my heart! Try me and know my thoughts! And see if there be any grievous way in me, and lead me in the way everlasting!”</a:t>
-            </a:r>
-          </a:p>
-        </p:txBody>
-      </p:sp>
-      <p:sp>
-        <p:nvSpPr>
-          <p:cNvPr id="90" name="SlideNum"/>
-          <p:cNvSpPr txBox="1"/>
-          <p:nvPr/>
-        </p:nvSpPr>
-        <p:spPr>
-          <a:xfrm>
-            <a:off x="11384280" y="6446520"/>
-            <a:ext cx="640080" cy="292608"/>
-          </a:xfrm>
-          <a:prstGeom prst="rect">
-            <a:avLst/>
-          </a:prstGeom>
-          <a:noFill/>
-        </p:spPr>
-        <p:txBody>
-          <a:bodyPr wrap="none" lIns="0" tIns="0" rIns="45720" bIns="0" anchor="ctr"/>
-          <a:lstStyle/>
-          <a:p>
-            <a:pPr algn="r"/>
-            <a:r>
-              <a:t>51</a:t>
-            </a:r>
-            <a:endParaRPr sz="1000" b="1">
-              <a:solidFill>
-                <a:srgbClr val="7A8A6E"/>
-              </a:solidFill>
-              <a:latin typeface="Calibri"/>
-            </a:endParaRPr>
-          </a:p>
-        </p:txBody>
-      </p:sp>
-    </p:spTree>
-  </p:cSld>
-  <p:clrMapOvr>
-    <a:masterClrMapping/>
-  </p:clrMapOvr>
-</p:sld>
-</file>
-
 <file path=ppt/slides/slide7.xml><?xml version="1.0" encoding="utf-8"?>
 <p:sld xmlns:a="http://schemas.openxmlformats.org/drawingml/2006/main" xmlns:r="http://schemas.openxmlformats.org/officeDocument/2006/relationships" xmlns:p="http://schemas.openxmlformats.org/presentationml/2006/main">
   <p:cSld>
@@ -8278,7 +8223,7 @@
                 </a:solidFill>
                 <a:latin typeface="Cambria"/>
               </a:rPr>
-              <a:t>Bridge to the Split</a:t>
+              <a:t>Psalm 139 — Being Known, Again</a:t>
             </a:r>
           </a:p>
         </p:txBody>
@@ -8291,8 +8236,8 @@
         </p:nvSpPr>
         <p:spPr>
           <a:xfrm>
-            <a:off x="822960" y="1554480"/>
-            <a:ext cx="10515600" cy="4892040"/>
+            <a:off x="822960" y="1600200"/>
+            <a:ext cx="5669280" cy="4572000"/>
           </a:xfrm>
           <a:prstGeom prst="rect">
             <a:avLst/>
@@ -8303,103 +8248,158 @@
           <a:bodyPr wrap="square" lIns="91440" tIns="91440" rIns="91440" bIns="91440"/>
           <a:lstStyle/>
           <a:p>
-            <a:pPr marL="342900" indent="-342900">
+            <a:pPr marL="274320" indent="-274320">
+              <a:spcAft>
+                <a:spcPts val="800"/>
+              </a:spcAft>
+            </a:pPr>
+            <a:r>
+              <a:rPr sz="2200" b="1" i="0">
+                <a:solidFill>
+                  <a:srgbClr val="97BC62"/>
+                </a:solidFill>
+                <a:latin typeface="Calibri"/>
+              </a:rPr>
+              <a:t>•  </a:t>
+            </a:r>
+            <a:r>
+              <a:rPr sz="2200" b="0" i="0">
+                <a:solidFill>
+                  <a:srgbClr val="222B22"/>
+                </a:solidFill>
+                <a:latin typeface="Calibri"/>
+              </a:rPr>
+              <a:t>Same psalm as last week, on purpose — nothing new tonight; we’re completing the round</a:t>
+            </a:r>
+          </a:p>
+          <a:p>
+            <a:pPr marL="274320" indent="-274320">
+              <a:spcAft>
+                <a:spcPts val="800"/>
+              </a:spcAft>
+            </a:pPr>
+            <a:r>
+              <a:rPr sz="2200" b="1" i="0">
+                <a:solidFill>
+                  <a:srgbClr val="97BC62"/>
+                </a:solidFill>
+                <a:latin typeface="Calibri"/>
+              </a:rPr>
+              <a:t>•  </a:t>
+            </a:r>
+            <a:r>
+              <a:rPr sz="2200" b="0" i="0">
+                <a:solidFill>
+                  <a:srgbClr val="222B22"/>
+                </a:solidFill>
+                <a:latin typeface="Calibri"/>
+              </a:rPr>
+              <a:t>One idea, repeated: the opposite of being hidden is not being exposed — it is being seen and being safe at the same time</a:t>
+            </a:r>
+          </a:p>
+          <a:p>
+            <a:pPr marL="274320" indent="-274320">
+              <a:spcAft>
+                <a:spcPts val="800"/>
+              </a:spcAft>
+            </a:pPr>
+            <a:r>
+              <a:rPr sz="2200" b="1" i="0">
+                <a:solidFill>
+                  <a:srgbClr val="97BC62"/>
+                </a:solidFill>
+                <a:latin typeface="Calibri"/>
+              </a:rPr>
+              <a:t>•  </a:t>
+            </a:r>
+            <a:r>
+              <a:rPr sz="2200" b="0" i="0">
+                <a:solidFill>
+                  <a:srgbClr val="222B22"/>
+                </a:solidFill>
+                <a:latin typeface="Calibri"/>
+              </a:rPr>
+              <a:t>The parents practiced that last Wednesday. Tonight the teens do</a:t>
+            </a:r>
+          </a:p>
+          <a:p>
+            <a:pPr marL="274320" indent="-274320">
+              <a:spcAft>
+                <a:spcPts val="800"/>
+              </a:spcAft>
+            </a:pPr>
+            <a:r>
+              <a:rPr sz="2200" b="1" i="0">
+                <a:solidFill>
+                  <a:srgbClr val="97BC62"/>
+                </a:solidFill>
+                <a:latin typeface="Calibri"/>
+              </a:rPr>
+              <a:t>•  </a:t>
+            </a:r>
+            <a:r>
+              <a:rPr sz="2200" b="0" i="0">
+                <a:solidFill>
+                  <a:srgbClr val="222B22"/>
+                </a:solidFill>
+                <a:latin typeface="Calibri"/>
+              </a:rPr>
+              <a:t>Put the comparison down — “Every story is its own. … The story you tell tonight is not in competition with any story told in this building last week. Tell yours.”</a:t>
+            </a:r>
+          </a:p>
+        </p:txBody>
+      </p:sp>
+      <p:sp>
+        <p:nvSpPr>
+          <p:cNvPr id="6" name="TextBox 6"/>
+          <p:cNvSpPr txBox="1"/>
+          <p:nvPr/>
+        </p:nvSpPr>
+        <p:spPr>
+          <a:xfrm>
+            <a:off x="6766560" y="1737360"/>
+            <a:ext cx="4663440" cy="2542032"/>
+          </a:xfrm>
+          <a:prstGeom prst="rect">
+            <a:avLst/>
+          </a:prstGeom>
+          <a:solidFill>
+            <a:srgbClr val="F1F6EC"/>
+          </a:solidFill>
+        </p:spPr>
+        <p:txBody>
+          <a:bodyPr wrap="square" lIns="91440" tIns="91440" rIns="91440" bIns="91440" anchor="ctr"/>
+          <a:lstStyle/>
+          <a:p>
+            <a:pPr>
               <a:spcAft>
                 <a:spcPts val="900"/>
               </a:spcAft>
             </a:pPr>
             <a:r>
-              <a:rPr sz="2800" b="1" i="0" dirty="0">
+              <a:rPr sz="1200" b="1" i="0">
                 <a:solidFill>
                   <a:srgbClr val="97BC62"/>
                 </a:solidFill>
                 <a:latin typeface="Calibri"/>
               </a:rPr>
-              <a:t>1   </a:t>
-            </a:r>
-            <a:r>
-              <a:rPr sz="2800" b="0" i="0" dirty="0">
-                <a:solidFill>
-                  <a:srgbClr val="222B22"/>
-                </a:solidFill>
-                <a:latin typeface="Calibri"/>
-              </a:rPr>
-              <a:t>“It’s one question — tell the story of how you got here, and what has shaped you.” The depth is yours to choose</a:t>
-            </a:r>
-          </a:p>
-          <a:p>
-            <a:pPr marL="342900" indent="-342900">
+              <a:t>PSALM 139:23–24</a:t>
+            </a:r>
+          </a:p>
+          <a:p>
+            <a:pPr>
               <a:spcAft>
-                <a:spcPts val="900"/>
+                <a:spcPts val="600"/>
               </a:spcAft>
             </a:pPr>
             <a:r>
-              <a:rPr sz="2800" b="1" i="0" dirty="0">
-                <a:solidFill>
-                  <a:srgbClr val="97BC62"/>
-                </a:solidFill>
-                <a:latin typeface="Calibri"/>
-              </a:rPr>
-              <a:t>2   </a:t>
-            </a:r>
-            <a:r>
-              <a:rPr sz="2800" b="0" i="0" dirty="0">
+              <a:rPr sz="2400" b="0" i="1">
                 <a:solidFill>
                   <a:srgbClr val="222B22"/>
                 </a:solidFill>
-                <a:latin typeface="Calibri"/>
-              </a:rPr>
-              <a:t>“When you’re listening — don’t fix, don’t advise, don’t relate back. Receive, and after each story, bless.”</a:t>
-            </a:r>
-          </a:p>
-          <a:p>
-            <a:pPr marL="342900" indent="-342900">
-              <a:spcAft>
-                <a:spcPts val="900"/>
-              </a:spcAft>
-            </a:pPr>
-            <a:r>
-              <a:rPr sz="2800" b="1" i="0" dirty="0">
-                <a:solidFill>
-                  <a:srgbClr val="97BC62"/>
-                </a:solidFill>
-                <a:latin typeface="Calibri"/>
-              </a:rPr>
-              <a:t>3   </a:t>
-            </a:r>
-            <a:r>
-              <a:rPr sz="2800" b="0" i="0" dirty="0">
-                <a:solidFill>
-                  <a:srgbClr val="222B22"/>
-                </a:solidFill>
-                <a:latin typeface="Calibri"/>
-              </a:rPr>
-              <a:t>“Nothing leaves your pair. Not a phrase, not a name, not a story.”</a:t>
-            </a:r>
-          </a:p>
-          <a:p>
-            <a:pPr marL="274320" indent="-274320">
-              <a:spcAft>
-                <a:spcPts val="900"/>
-              </a:spcAft>
-            </a:pPr>
-            <a:r>
-              <a:rPr sz="2800" b="1" i="0" dirty="0">
-                <a:solidFill>
-                  <a:srgbClr val="97BC62"/>
-                </a:solidFill>
-                <a:latin typeface="Calibri"/>
-              </a:rPr>
-              <a:t>•  </a:t>
-            </a:r>
-            <a:r>
-              <a:rPr sz="2800" b="0" i="0" dirty="0">
-                <a:solidFill>
-                  <a:srgbClr val="222B22"/>
-                </a:solidFill>
-                <a:latin typeface="Calibri"/>
-              </a:rPr>
-              <a:t>Same pairs and in pairs where you sit as last week — your family stays with you</a:t>
+                <a:latin typeface="Cambria"/>
+              </a:rPr>
+              <a:t>“Search me, O God, and know my heart! Try me and know my thoughts! And see if there be any grievous way in me, and lead me in the way everlasting!”</a:t>
             </a:r>
           </a:p>
         </p:txBody>
@@ -8426,7 +8426,7 @@
           <a:p>
             <a:pPr algn="r"/>
             <a:r>
-              <a:t>52</a:t>
+              <a:t>51</a:t>
             </a:r>
             <a:endParaRPr sz="1000" b="1">
               <a:solidFill>
@@ -8525,7 +8525,7 @@
                 </a:solidFill>
                 <a:latin typeface="Cambria"/>
               </a:rPr>
-              <a:t>Stories in pairs — the Teens Tell</a:t>
+              <a:t>Bridge to the Split</a:t>
             </a:r>
           </a:p>
         </p:txBody>
@@ -8550,13 +8550,88 @@
           <a:bodyPr wrap="square" lIns="91440" tIns="91440" rIns="91440" bIns="91440"/>
           <a:lstStyle/>
           <a:p>
+            <a:pPr marL="342900" indent="-342900">
+              <a:spcAft>
+                <a:spcPts val="900"/>
+              </a:spcAft>
+            </a:pPr>
+            <a:r>
+              <a:rPr sz="2800" b="1" i="0" dirty="0">
+                <a:solidFill>
+                  <a:srgbClr val="97BC62"/>
+                </a:solidFill>
+                <a:latin typeface="Calibri"/>
+              </a:rPr>
+              <a:t>1   </a:t>
+            </a:r>
+            <a:r>
+              <a:rPr sz="2800" b="0" i="0" dirty="0">
+                <a:solidFill>
+                  <a:srgbClr val="222B22"/>
+                </a:solidFill>
+                <a:latin typeface="Calibri"/>
+              </a:rPr>
+              <a:t>“It’s one question — tell the story of how you got here, and what has shaped you.” The depth is yours to choose</a:t>
+            </a:r>
+          </a:p>
+          <a:p>
+            <a:pPr marL="342900" indent="-342900">
+              <a:spcAft>
+                <a:spcPts val="900"/>
+              </a:spcAft>
+            </a:pPr>
+            <a:r>
+              <a:rPr sz="2800" b="1" i="0" dirty="0">
+                <a:solidFill>
+                  <a:srgbClr val="97BC62"/>
+                </a:solidFill>
+                <a:latin typeface="Calibri"/>
+              </a:rPr>
+              <a:t>2   </a:t>
+            </a:r>
+            <a:r>
+              <a:rPr sz="2800" b="0" i="0" dirty="0">
+                <a:solidFill>
+                  <a:srgbClr val="222B22"/>
+                </a:solidFill>
+                <a:latin typeface="Calibri"/>
+              </a:rPr>
+              <a:t>“When you’re listening — don’t fix, don’t advise, don’t relate back. Receive, and after each story, bless.”</a:t>
+            </a:r>
+          </a:p>
+          <a:p>
+            <a:pPr marL="342900" indent="-342900">
+              <a:spcAft>
+                <a:spcPts val="900"/>
+              </a:spcAft>
+            </a:pPr>
+            <a:r>
+              <a:rPr sz="2800" b="1" i="0" dirty="0">
+                <a:solidFill>
+                  <a:srgbClr val="97BC62"/>
+                </a:solidFill>
+                <a:latin typeface="Calibri"/>
+              </a:rPr>
+              <a:t>3   </a:t>
+            </a:r>
+            <a:r>
+              <a:rPr sz="2800" b="0" i="0" dirty="0">
+                <a:solidFill>
+                  <a:srgbClr val="222B22"/>
+                </a:solidFill>
+                <a:latin typeface="Calibri"/>
+              </a:rPr>
+              <a:t>“Nothing leaves your pair. Not a phrase, not a name, not a story.”</a:t>
+            </a:r>
+          </a:p>
+          <a:p>
             <a:pPr marL="274320" indent="-274320">
               <a:spcAft>
-                <a:spcPts val="750"/>
+                <a:spcPts val="900"/>
               </a:spcAft>
             </a:pPr>
             <a:r>
-              <a:rPr sz="2400" b="1" i="0" dirty="0">
+              <a:rPr sz="2800" b="1" i="0" dirty="0">
                 <a:solidFill>
                   <a:srgbClr val="97BC62"/>
                 </a:solidFill>
@@ -8565,138 +8640,13 @@
               <a:t>•  </a:t>
             </a:r>
             <a:r>
-              <a:rPr sz="2400" b="0" i="0" dirty="0">
+              <a:rPr sz="2800" b="0" i="0" dirty="0">
                 <a:solidFill>
                   <a:srgbClr val="222B22"/>
                 </a:solidFill>
                 <a:latin typeface="Calibri"/>
               </a:rPr>
-              <a:t>The teens tell — same pairs, same single question, same blessing. Second running</a:t>
-            </a:r>
-          </a:p>
-          <a:p>
-            <a:pPr marL="342900" indent="-342900">
-              <a:spcAft>
-                <a:spcPts val="750"/>
-              </a:spcAft>
-            </a:pPr>
-            <a:r>
-              <a:rPr sz="2400" b="1" i="0" dirty="0">
-                <a:solidFill>
-                  <a:srgbClr val="97BC62"/>
-                </a:solidFill>
-                <a:latin typeface="Calibri"/>
-              </a:rPr>
-              <a:t>1   </a:t>
-            </a:r>
-            <a:r>
-              <a:rPr sz="2400" b="0" i="0" dirty="0">
-                <a:solidFill>
-                  <a:srgbClr val="222B22"/>
-                </a:solidFill>
-                <a:latin typeface="Calibri"/>
-              </a:rPr>
-              <a:t>Story — 5–7 minutes. Nobody interrupts, even the silences</a:t>
-            </a:r>
-          </a:p>
-          <a:p>
-            <a:pPr marL="342900" indent="-342900">
-              <a:spcAft>
-                <a:spcPts val="750"/>
-              </a:spcAft>
-            </a:pPr>
-            <a:r>
-              <a:rPr sz="2400" b="1" i="0" dirty="0">
-                <a:solidFill>
-                  <a:srgbClr val="97BC62"/>
-                </a:solidFill>
-                <a:latin typeface="Calibri"/>
-              </a:rPr>
-              <a:t>2   </a:t>
-            </a:r>
-            <a:r>
-              <a:rPr sz="2400" b="0" i="0" dirty="0">
-                <a:solidFill>
-                  <a:srgbClr val="222B22"/>
-                </a:solidFill>
-                <a:latin typeface="Calibri"/>
-              </a:rPr>
-              <a:t>Silence — ten seconds</a:t>
-            </a:r>
-          </a:p>
-          <a:p>
-            <a:pPr marL="342900" indent="-342900">
-              <a:spcAft>
-                <a:spcPts val="750"/>
-              </a:spcAft>
-            </a:pPr>
-            <a:r>
-              <a:rPr sz="2400" b="1" i="0" dirty="0">
-                <a:solidFill>
-                  <a:srgbClr val="97BC62"/>
-                </a:solidFill>
-                <a:latin typeface="Calibri"/>
-              </a:rPr>
-              <a:t>3   </a:t>
-            </a:r>
-            <a:r>
-              <a:rPr sz="2400" b="0" i="0" dirty="0">
-                <a:solidFill>
-                  <a:srgbClr val="222B22"/>
-                </a:solidFill>
-                <a:latin typeface="Calibri"/>
-              </a:rPr>
-              <a:t>Blessing round — the arranged parent blesses first, then the circle: one or two sentences each</a:t>
-            </a:r>
-          </a:p>
-          <a:p>
-            <a:pPr marL="274320" indent="-274320">
-              <a:spcAft>
-                <a:spcPts val="750"/>
-              </a:spcAft>
-            </a:pPr>
-            <a:r>
-              <a:rPr sz="2400" b="1" i="0" dirty="0">
-                <a:solidFill>
-                  <a:srgbClr val="97BC62"/>
-                </a:solidFill>
-                <a:latin typeface="Calibri"/>
-              </a:rPr>
-              <a:t>•  </a:t>
-            </a:r>
-            <a:r>
-              <a:rPr sz="2400" b="0" i="0" dirty="0">
-                <a:solidFill>
-                  <a:srgbClr val="222B22"/>
-                </a:solidFill>
-                <a:latin typeface="Calibri"/>
-              </a:rPr>
-              <a:t>Parents tonight: receive and bless — no correcting the record, no filling silences</a:t>
-            </a:r>
-          </a:p>
-          <a:p>
-            <a:pPr marL="274320" indent="-274320">
-              <a:spcAft>
-                <a:spcPts val="750"/>
-              </a:spcAft>
-            </a:pPr>
-            <a:r>
-              <a:rPr sz="2400" b="1" i="0" dirty="0">
-                <a:solidFill>
-                  <a:srgbClr val="97BC62"/>
-                </a:solidFill>
-                <a:latin typeface="Calibri"/>
-              </a:rPr>
-              <a:t>•  </a:t>
-            </a:r>
-            <a:r>
-              <a:rPr sz="2400" b="0" i="0" dirty="0">
-                <a:solidFill>
-                  <a:srgbClr val="222B22"/>
-                </a:solidFill>
-                <a:latin typeface="Calibri"/>
-              </a:rPr>
-              <a:t>“What’s said in this circle stays in this circle. And when someone is telling, we’re looking at them. We’re receiving.”</a:t>
+              <a:t>Same pairs and in pairs where you sit as last week — your family stays with you</a:t>
             </a:r>
           </a:p>
         </p:txBody>
@@ -8723,7 +8673,7 @@
           <a:p>
             <a:pPr algn="r"/>
             <a:r>
-              <a:t>53</a:t>
+              <a:t>52</a:t>
             </a:r>
             <a:endParaRPr sz="1000" b="1">
               <a:solidFill>
@@ -8822,7 +8772,7 @@
                 </a:solidFill>
                 <a:latin typeface="Cambria"/>
               </a:rPr>
-              <a:t>Merge and One-Word Landing</a:t>
+              <a:t>Stories in pairs — the Teens Tell</a:t>
             </a:r>
           </a:p>
         </p:txBody>
@@ -8849,11 +8799,11 @@
           <a:p>
             <a:pPr marL="274320" indent="-274320">
               <a:spcAft>
-                <a:spcPts val="900"/>
+                <a:spcPts val="750"/>
               </a:spcAft>
             </a:pPr>
             <a:r>
-              <a:rPr sz="2800" b="1" i="0" dirty="0">
+              <a:rPr sz="2400" b="1" i="0" dirty="0">
                 <a:solidFill>
                   <a:srgbClr val="97BC62"/>
                 </a:solidFill>
@@ -8862,23 +8812,98 @@
               <a:t>•  </a:t>
             </a:r>
             <a:r>
-              <a:rPr sz="2800" b="0" i="0" dirty="0">
+              <a:rPr sz="2400" b="0" i="0" dirty="0">
                 <a:solidFill>
                   <a:srgbClr val="222B22"/>
                 </a:solidFill>
                 <a:latin typeface="Calibri"/>
               </a:rPr>
-              <a:t>What happened in your pair stays in your pair</a:t>
+              <a:t>The teens tell — same pairs, same single question, same blessing. Second running</a:t>
+            </a:r>
+          </a:p>
+          <a:p>
+            <a:pPr marL="342900" indent="-342900">
+              <a:spcAft>
+                <a:spcPts val="750"/>
+              </a:spcAft>
+            </a:pPr>
+            <a:r>
+              <a:rPr sz="2400" b="1" i="0" dirty="0">
+                <a:solidFill>
+                  <a:srgbClr val="97BC62"/>
+                </a:solidFill>
+                <a:latin typeface="Calibri"/>
+              </a:rPr>
+              <a:t>1   </a:t>
+            </a:r>
+            <a:r>
+              <a:rPr sz="2400" b="0" i="0" dirty="0">
+                <a:solidFill>
+                  <a:srgbClr val="222B22"/>
+                </a:solidFill>
+                <a:latin typeface="Calibri"/>
+              </a:rPr>
+              <a:t>Story — 5–7 minutes. Nobody interrupts, even the silences</a:t>
+            </a:r>
+          </a:p>
+          <a:p>
+            <a:pPr marL="342900" indent="-342900">
+              <a:spcAft>
+                <a:spcPts val="750"/>
+              </a:spcAft>
+            </a:pPr>
+            <a:r>
+              <a:rPr sz="2400" b="1" i="0" dirty="0">
+                <a:solidFill>
+                  <a:srgbClr val="97BC62"/>
+                </a:solidFill>
+                <a:latin typeface="Calibri"/>
+              </a:rPr>
+              <a:t>2   </a:t>
+            </a:r>
+            <a:r>
+              <a:rPr sz="2400" b="0" i="0" dirty="0">
+                <a:solidFill>
+                  <a:srgbClr val="222B22"/>
+                </a:solidFill>
+                <a:latin typeface="Calibri"/>
+              </a:rPr>
+              <a:t>Silence — ten seconds</a:t>
+            </a:r>
+          </a:p>
+          <a:p>
+            <a:pPr marL="342900" indent="-342900">
+              <a:spcAft>
+                <a:spcPts val="750"/>
+              </a:spcAft>
+            </a:pPr>
+            <a:r>
+              <a:rPr sz="2400" b="1" i="0" dirty="0">
+                <a:solidFill>
+                  <a:srgbClr val="97BC62"/>
+                </a:solidFill>
+                <a:latin typeface="Calibri"/>
+              </a:rPr>
+              <a:t>3   </a:t>
+            </a:r>
+            <a:r>
+              <a:rPr sz="2400" b="0" i="0" dirty="0">
+                <a:solidFill>
+                  <a:srgbClr val="222B22"/>
+                </a:solidFill>
+                <a:latin typeface="Calibri"/>
+              </a:rPr>
+              <a:t>Blessing round — the arranged parent blesses first, then the circle: one or two sentences each</a:t>
             </a:r>
           </a:p>
           <a:p>
             <a:pPr marL="274320" indent="-274320">
               <a:spcAft>
-                <a:spcPts val="900"/>
+                <a:spcPts val="750"/>
               </a:spcAft>
             </a:pPr>
             <a:r>
-              <a:rPr sz="2800" b="1" i="0" dirty="0">
+              <a:rPr sz="2400" b="1" i="0" dirty="0">
                 <a:solidFill>
                   <a:srgbClr val="97BC62"/>
                 </a:solidFill>
@@ -8887,23 +8912,23 @@
               <a:t>•  </a:t>
             </a:r>
             <a:r>
-              <a:rPr sz="2800" b="0" i="0" dirty="0">
+              <a:rPr sz="2400" b="0" i="0" dirty="0">
                 <a:solidFill>
                   <a:srgbClr val="222B22"/>
                 </a:solidFill>
                 <a:latin typeface="Calibri"/>
               </a:rPr>
-              <a:t>One word, when you’re ready, about what tonight was like — an arranged parent starts. You can pass</a:t>
+              <a:t>Parents tonight: receive and bless — no correcting the record, no filling silences</a:t>
             </a:r>
           </a:p>
           <a:p>
             <a:pPr marL="274320" indent="-274320">
               <a:spcAft>
-                <a:spcPts val="900"/>
+                <a:spcPts val="750"/>
               </a:spcAft>
             </a:pPr>
             <a:r>
-              <a:rPr sz="2800" b="1" i="0" dirty="0">
+              <a:rPr sz="2400" b="1" i="0" dirty="0">
                 <a:solidFill>
                   <a:srgbClr val="97BC62"/>
                 </a:solidFill>
@@ -8912,38 +8937,13 @@
               <a:t>•  </a:t>
             </a:r>
             <a:r>
-              <a:rPr sz="2800" b="0" i="0" dirty="0">
+              <a:rPr sz="2400" b="0" i="0" dirty="0">
                 <a:solidFill>
                   <a:srgbClr val="222B22"/>
                 </a:solidFill>
                 <a:latin typeface="Calibri"/>
               </a:rPr>
-              <a:t>“The round is complete — every person in this room, parent and teen, has now told a piece of their story to a circle that blessed them for it.”</a:t>
-            </a:r>
-          </a:p>
-          <a:p>
-            <a:pPr marL="274320" indent="-274320">
-              <a:spcAft>
-                <a:spcPts val="900"/>
-              </a:spcAft>
-            </a:pPr>
-            <a:r>
-              <a:rPr sz="2800" b="1" i="0" dirty="0">
-                <a:solidFill>
-                  <a:srgbClr val="97BC62"/>
-                </a:solidFill>
-                <a:latin typeface="Calibri"/>
-              </a:rPr>
-              <a:t>•  </a:t>
-            </a:r>
-            <a:r>
-              <a:rPr sz="2800" b="0" i="0" dirty="0">
-                <a:solidFill>
-                  <a:srgbClr val="222B22"/>
-                </a:solidFill>
-                <a:latin typeface="Calibri"/>
-              </a:rPr>
-              <a:t>“Rooms like this one are rare. They’re also the kind of room God shows up in.”</a:t>
+              <a:t>“What’s said in this circle stays in this circle. And when someone is telling, we’re looking at them. We’re receiving.”</a:t>
             </a:r>
           </a:p>
         </p:txBody>
@@ -8970,7 +8970,7 @@
           <a:p>
             <a:pPr algn="r"/>
             <a:r>
-              <a:t>54</a:t>
+              <a:t>53</a:t>
             </a:r>
             <a:endParaRPr sz="1000" b="1">
               <a:solidFill>

--- a/_implementation-notes/evening-series/FotH Evening Session 4 Slides DRAFT v1.pptx
+++ b/_implementation-notes/evening-series/FotH Evening Session 4 Slides DRAFT v1.pptx
@@ -7064,7 +7064,7 @@
           <p:nvPr/>
         </p:nvPicPr>
         <p:blipFill>
-          <a:blip r:embed="rId4"/>
+          <a:blip r:embed="rId5"/>
           <a:stretch>
             <a:fillRect/>
           </a:stretch>

--- a/_implementation-notes/evening-series/FotH Evening Session 4 Slides DRAFT v1.pptx
+++ b/_implementation-notes/evening-series/FotH Evening Session 4 Slides DRAFT v1.pptx
@@ -5180,7 +5180,7 @@
           <a:p>
             <a:pPr algn="r"/>
             <a:r>
-              <a:t>54</a:t>
+              <a:t>60</a:t>
             </a:r>
             <a:endParaRPr sz="1000" b="1">
               <a:solidFill>
@@ -5452,7 +5452,7 @@
           <a:p>
             <a:pPr algn="r"/>
             <a:r>
-              <a:t>55</a:t>
+              <a:t>61</a:t>
             </a:r>
             <a:endParaRPr sz="1000" b="1">
               <a:solidFill>
@@ -5680,7 +5680,7 @@
           <a:p>
             <a:pPr algn="r"/>
             <a:r>
-              <a:t>56</a:t>
+              <a:t>62</a:t>
             </a:r>
             <a:endParaRPr sz="1000" b="1">
               <a:solidFill>
@@ -5872,7 +5872,7 @@
           <a:p>
             <a:pPr algn="r"/>
             <a:r>
-              <a:t>56a</a:t>
+              <a:t>63</a:t>
             </a:r>
             <a:endParaRPr sz="1000" b="1">
               <a:solidFill>
@@ -6169,7 +6169,7 @@
           <a:p>
             <a:pPr algn="r"/>
             <a:r>
-              <a:t>57</a:t>
+              <a:t>64</a:t>
             </a:r>
             <a:endParaRPr sz="1000" b="1">
               <a:solidFill>
@@ -6614,7 +6614,7 @@
           <a:p>
             <a:pPr algn="r"/>
             <a:r>
-              <a:t>58</a:t>
+              <a:t>65</a:t>
             </a:r>
             <a:endParaRPr sz="1000" b="1">
               <a:solidFill>
@@ -6863,7 +6863,7 @@
           <a:p>
             <a:pPr algn="r"/>
             <a:r>
-              <a:t>47</a:t>
+              <a:t>52</a:t>
             </a:r>
             <a:endParaRPr sz="1000" b="1">
               <a:solidFill>
@@ -7044,7 +7044,7 @@
           <a:p>
             <a:pPr algn="r"/>
             <a:r>
-              <a:t>47a</a:t>
+              <a:t>53</a:t>
             </a:r>
             <a:endParaRPr sz="1000" b="1">
               <a:solidFill>
@@ -7458,7 +7458,7 @@
           <a:p>
             <a:pPr algn="r"/>
             <a:r>
-              <a:t>48</a:t>
+              <a:t>54</a:t>
             </a:r>
             <a:endParaRPr sz="1000" b="1">
               <a:solidFill>
@@ -7841,7 +7841,7 @@
           <a:p>
             <a:pPr algn="r"/>
             <a:r>
-              <a:t>49</a:t>
+              <a:t>55</a:t>
             </a:r>
             <a:endParaRPr sz="1000" b="1">
               <a:solidFill>
@@ -8088,7 +8088,7 @@
           <a:p>
             <a:pPr algn="r"/>
             <a:r>
-              <a:t>50</a:t>
+              <a:t>56</a:t>
             </a:r>
             <a:endParaRPr sz="1000" b="1">
               <a:solidFill>
@@ -8426,7 +8426,7 @@
           <a:p>
             <a:pPr algn="r"/>
             <a:r>
-              <a:t>51</a:t>
+              <a:t>57</a:t>
             </a:r>
             <a:endParaRPr sz="1000" b="1">
               <a:solidFill>
@@ -8673,7 +8673,7 @@
           <a:p>
             <a:pPr algn="r"/>
             <a:r>
-              <a:t>52</a:t>
+              <a:t>58</a:t>
             </a:r>
             <a:endParaRPr sz="1000" b="1">
               <a:solidFill>
@@ -8970,7 +8970,7 @@
           <a:p>
             <a:pPr algn="r"/>
             <a:r>
-              <a:t>53</a:t>
+              <a:t>59</a:t>
             </a:r>
             <a:endParaRPr sz="1000" b="1">
               <a:solidFill>

--- a/_implementation-notes/evening-series/FotH Evening Session 4 Slides DRAFT v1.pptx
+++ b/_implementation-notes/evening-series/FotH Evening Session 4 Slides DRAFT v1.pptx
@@ -7064,7 +7064,7 @@
           <p:nvPr/>
         </p:nvPicPr>
         <p:blipFill>
-          <a:blip r:embed="rId5"/>
+          <a:blip r:embed="rId6"/>
           <a:stretch>
             <a:fillRect/>
           </a:stretch>

--- a/_implementation-notes/evening-series/FotH Evening Session 4 Slides DRAFT v1.pptx
+++ b/_implementation-notes/evening-series/FotH Evening Session 4 Slides DRAFT v1.pptx
@@ -1497,7 +1497,7 @@
           <a:p>
             <a:r>
               <a:rPr lang="en-US" sz="1200"/>
-              <a:t>S4 · 8:16–8:20 · LEAD: CONTENT PRESENTER</a:t>
+              <a:t>S4 · 8:16–8:20 · LEAD: CONTAINER HOLDER</a:t>
             </a:r>
           </a:p>
           <a:p>

--- a/_implementation-notes/evening-series/FotH Evening Session 4 Slides DRAFT v1.pptx
+++ b/_implementation-notes/evening-series/FotH Evening Session 4 Slides DRAFT v1.pptx
@@ -1357,7 +1357,7 @@
           </a:p>
           <a:p>
             <a:r>
-              <a:t>2. The senior prays, then sends: same pairs, in pairs where you sit as last week, families together; back at 5:12.</a:t>
+              <a:t>2. The senior prays, then sends: same pairs, in pairs where you sit as last week, families together; back at 8:16.</a:t>
             </a:r>
           </a:p>
           <a:p>

--- a/_implementation-notes/evening-series/FotH Evening Session 4 Slides DRAFT v1.pptx
+++ b/_implementation-notes/evening-series/FotH Evening Session 4 Slides DRAFT v1.pptx
@@ -1715,32 +1715,32 @@
           <a:lstStyle/>
           <a:p>
             <a:r>
-              <a:rPr lang="en-US" sz="1200"/>
               <a:t>S4 · 8:28–8:30 · LEAD: CONTAINER HOLDER</a:t>
             </a:r>
           </a:p>
           <a:p>
             <a:r>
-              <a:rPr lang="en-US" sz="1200"/>
               <a:t>BEATS:</a:t>
             </a:r>
           </a:p>
           <a:p>
             <a:r>
-              <a:rPr lang="en-US" sz="1200"/>
               <a:t>1. The senior closes from the card: your story goes home with you, nobody else's; help named; Aaronic blessing; 'Go gently this week.'</a:t>
             </a:r>
           </a:p>
           <a:p>
             <a:r>
-              <a:rPr lang="en-US" sz="1200"/>
               <a:t>2. Adults stay accessible ten minutes after, as always.</a:t>
             </a:r>
           </a:p>
           <a:p>
             <a:r>
-              <a:rPr lang="en-US" sz="1200"/>
               <a:t>CUES: Find the senior privately before they leave: one sentence of thanks, one question — 'How are you, after that?' — and a listen. No coaching today; that waits for the debrief and the Lab.</a:t>
+            </a:r>
+          </a:p>
+          <a:p>
+            <a:r>
+              <a:t>BLESSINGS: eyes on the person, not the screen — nothing to read; say what is on your heart for them, specific and short.</a:t>
             </a:r>
           </a:p>
         </p:txBody>
@@ -6475,7 +6475,7 @@
                 </a:solidFill>
                 <a:latin typeface="Calibri"/>
               </a:rPr>
-              <a:t>Blessings — specific, witnessed, short</a:t>
+              <a:t>Blessings — eyes on the person, not the screen: say what is on your heart for them. Specific, witnessed, short</a:t>
             </a:r>
           </a:p>
           <a:p>
